--- a/wellness-business-plan/slides/ウェルネス事業計画_最終版v4_スライド.pptx
+++ b/wellness-business-plan/slides/ウェルネス事業計画_最終版v4_スライド.pptx
@@ -20,6 +20,7 @@
     <p:sldId id="268" r:id="rId19"/>
     <p:sldId id="269" r:id="rId20"/>
     <p:sldId id="270" r:id="rId21"/>
+    <p:sldId id="271" r:id="rId22"/>
   </p:sldIdLst>
   <p:sldSz cx="12191695" cy="6858000" type="screen4x3"/>
   <p:notesSz cx="6858000" cy="9144000"/>
@@ -3420,6 +3421,635 @@
                 </a:solidFill>
                 <a:latin typeface="Yu Gothic"/>
               </a:rPr>
+              <a:t>入口の型 ― 「社員の気持ちを知る」から始める</a:t>
+            </a:r>
+          </a:p>
+        </p:txBody>
+      </p:sp>
+      <p:sp>
+        <p:nvSpPr>
+          <p:cNvPr id="4" name="TextBox 3"/>
+          <p:cNvSpPr txBox="1"/>
+          <p:nvPr/>
+        </p:nvSpPr>
+        <p:spPr>
+          <a:xfrm>
+            <a:off x="502920" y="896112"/>
+            <a:ext cx="11247120" cy="365760"/>
+          </a:xfrm>
+          <a:prstGeom prst="rect">
+            <a:avLst/>
+          </a:prstGeom>
+          <a:noFill/>
+        </p:spPr>
+        <p:txBody>
+          <a:bodyPr wrap="square" anchor="t">
+            <a:spAutoFit/>
+          </a:bodyPr>
+          <a:lstStyle/>
+          <a:p>
+            <a:pPr algn="l"/>
+            <a:r>
+              <a:rPr sz="1200" b="0">
+                <a:solidFill>
+                  <a:srgbClr val="666666"/>
+                </a:solidFill>
+                <a:latin typeface="Yu Gothic"/>
+              </a:rPr>
+              <a:t>立ち位置は「社長の味方」。ただし社員の前では「会社と皆さんの間の通訳」— 言葉を使い分ける</a:t>
+            </a:r>
+          </a:p>
+        </p:txBody>
+      </p:sp>
+      <p:graphicFrame>
+        <p:nvGraphicFramePr>
+          <p:cNvPr id="5" name="Table 4"/>
+          <p:cNvGraphicFramePr>
+            <a:graphicFrameLocks noGrp="1"/>
+          </p:cNvGraphicFramePr>
+          <p:nvPr/>
+        </p:nvGraphicFramePr>
+        <p:xfrm>
+          <a:off x="548640" y="1417320"/>
+          <a:ext cx="11064237" cy="4828032"/>
+        </p:xfrm>
+        <a:graphic>
+          <a:graphicData uri="http://schemas.openxmlformats.org/drawingml/2006/table">
+            <a:tbl>
+              <a:tblPr firstRow="1" bandRow="1">
+                <a:tableStyleId>{5C22544A-7EE6-4342-B048-85BDC9FD1C3A}</a:tableStyleId>
+              </a:tblPr>
+              <a:tblGrid>
+                <a:gridCol w="2194559"/>
+                <a:gridCol w="4571999"/>
+                <a:gridCol w="4297679"/>
+              </a:tblGrid>
+              <a:tr h="804672">
+                <a:tc>
+                  <a:txBody>
+                    <a:bodyPr wrap="square"/>
+                    <a:lstStyle/>
+                    <a:p>
+                      <a:r>
+                        <a:rPr sz="1100" b="1">
+                          <a:solidFill>
+                            <a:srgbClr val="FFFFFF"/>
+                          </a:solidFill>
+                          <a:latin typeface="Yu Gothic"/>
+                        </a:rPr>
+                        <a:t>原則</a:t>
+                      </a:r>
+                    </a:p>
+                  </a:txBody>
+                  <a:tcPr marL="54864" marR="54864" marT="18288" marB="18288">
+                    <a:solidFill>
+                      <a:srgbClr val="1F3A5F"/>
+                    </a:solidFill>
+                  </a:tcPr>
+                </a:tc>
+                <a:tc>
+                  <a:txBody>
+                    <a:bodyPr wrap="square"/>
+                    <a:lstStyle/>
+                    <a:p>
+                      <a:r>
+                        <a:rPr sz="1100" b="1">
+                          <a:solidFill>
+                            <a:srgbClr val="FFFFFF"/>
+                          </a:solidFill>
+                          <a:latin typeface="Yu Gothic"/>
+                        </a:rPr>
+                        <a:t>やり方</a:t>
+                      </a:r>
+                    </a:p>
+                  </a:txBody>
+                  <a:tcPr marL="54864" marR="54864" marT="18288" marB="18288">
+                    <a:solidFill>
+                      <a:srgbClr val="1F3A5F"/>
+                    </a:solidFill>
+                  </a:tcPr>
+                </a:tc>
+                <a:tc>
+                  <a:txBody>
+                    <a:bodyPr wrap="square"/>
+                    <a:lstStyle/>
+                    <a:p>
+                      <a:r>
+                        <a:rPr sz="1100" b="1">
+                          <a:solidFill>
+                            <a:srgbClr val="FFFFFF"/>
+                          </a:solidFill>
+                          <a:latin typeface="Yu Gothic"/>
+                        </a:rPr>
+                        <a:t>なぜ（外すと起きる失敗）</a:t>
+                      </a:r>
+                    </a:p>
+                  </a:txBody>
+                  <a:tcPr marL="54864" marR="54864" marT="18288" marB="18288">
+                    <a:solidFill>
+                      <a:srgbClr val="1F3A5F"/>
+                    </a:solidFill>
+                  </a:tcPr>
+                </a:tc>
+              </a:tr>
+              <a:tr h="804672">
+                <a:tc>
+                  <a:txBody>
+                    <a:bodyPr wrap="square"/>
+                    <a:lstStyle/>
+                    <a:p>
+                      <a:r>
+                        <a:rPr sz="950" b="0">
+                          <a:solidFill>
+                            <a:srgbClr val="222222"/>
+                          </a:solidFill>
+                          <a:latin typeface="Yu Gothic"/>
+                        </a:rPr>
+                        <a:t>アンケートは新設しない</a:t>
+                      </a:r>
+                    </a:p>
+                  </a:txBody>
+                  <a:tcPr marL="54864" marR="54864" marT="18288" marB="18288">
+                    <a:solidFill>
+                      <a:srgbClr val="FFFFFF"/>
+                    </a:solidFill>
+                  </a:tcPr>
+                </a:tc>
+                <a:tc>
+                  <a:txBody>
+                    <a:bodyPr wrap="square"/>
+                    <a:lstStyle/>
+                    <a:p>
+                      <a:r>
+                        <a:rPr sz="950" b="0">
+                          <a:solidFill>
+                            <a:srgbClr val="222222"/>
+                          </a:solidFill>
+                          <a:latin typeface="Yu Gothic"/>
+                        </a:rPr>
+                        <a:t>睡眠偏差値＋カスタム設問3〜5問（満足度・お金の意識）に一本化</a:t>
+                      </a:r>
+                    </a:p>
+                  </a:txBody>
+                  <a:tcPr marL="54864" marR="54864" marT="18288" marB="18288">
+                    <a:solidFill>
+                      <a:srgbClr val="FFFFFF"/>
+                    </a:solidFill>
+                  </a:tcPr>
+                </a:tc>
+                <a:tc>
+                  <a:txBody>
+                    <a:bodyPr wrap="square"/>
+                    <a:lstStyle/>
+                    <a:p>
+                      <a:r>
+                        <a:rPr sz="950" b="0">
+                          <a:solidFill>
+                            <a:srgbClr val="222222"/>
+                          </a:solidFill>
+                          <a:latin typeface="Yu Gothic"/>
+                        </a:rPr>
+                        <a:t>汎用サーベイはコモディティ（月300円/人のツール多数）で差別化ゼロ。二重測定は「またアンケートか」のサーベイ疲れを生む</a:t>
+                      </a:r>
+                    </a:p>
+                  </a:txBody>
+                  <a:tcPr marL="54864" marR="54864" marT="18288" marB="18288">
+                    <a:solidFill>
+                      <a:srgbClr val="FFFFFF"/>
+                    </a:solidFill>
+                  </a:tcPr>
+                </a:tc>
+              </a:tr>
+              <a:tr h="804672">
+                <a:tc>
+                  <a:txBody>
+                    <a:bodyPr wrap="square"/>
+                    <a:lstStyle/>
+                    <a:p>
+                      <a:r>
+                        <a:rPr sz="950" b="0">
+                          <a:solidFill>
+                            <a:srgbClr val="222222"/>
+                          </a:solidFill>
+                          <a:latin typeface="Yu Gothic"/>
+                        </a:rPr>
+                        <a:t>匿名・外部集計を明示</a:t>
+                      </a:r>
+                    </a:p>
+                  </a:txBody>
+                  <a:tcPr marL="54864" marR="54864" marT="18288" marB="18288">
+                    <a:solidFill>
+                      <a:srgbClr val="F2F5F8"/>
+                    </a:solidFill>
+                  </a:tcPr>
+                </a:tc>
+                <a:tc>
+                  <a:txBody>
+                    <a:bodyPr wrap="square"/>
+                    <a:lstStyle/>
+                    <a:p>
+                      <a:r>
+                        <a:rPr sz="950" b="0">
+                          <a:solidFill>
+                            <a:srgbClr val="222222"/>
+                          </a:solidFill>
+                          <a:latin typeface="Yu Gothic"/>
+                        </a:rPr>
+                        <a:t>「回答は光和が預かり、個人が特定される形で社長には渡りません」と宣言</a:t>
+                      </a:r>
+                    </a:p>
+                  </a:txBody>
+                  <a:tcPr marL="54864" marR="54864" marT="18288" marB="18288">
+                    <a:solidFill>
+                      <a:srgbClr val="F2F5F8"/>
+                    </a:solidFill>
+                  </a:tcPr>
+                </a:tc>
+                <a:tc>
+                  <a:txBody>
+                    <a:bodyPr wrap="square"/>
+                    <a:lstStyle/>
+                    <a:p>
+                      <a:r>
+                        <a:rPr sz="950" b="0">
+                          <a:solidFill>
+                            <a:srgbClr val="222222"/>
+                          </a:solidFill>
+                          <a:latin typeface="Yu Gothic"/>
+                        </a:rPr>
+                        <a:t>社員から見れば小林は「会社側の人」。匿名の担保がないと本音は書かれず、データが嘘になる</a:t>
+                      </a:r>
+                    </a:p>
+                  </a:txBody>
+                  <a:tcPr marL="54864" marR="54864" marT="18288" marB="18288">
+                    <a:solidFill>
+                      <a:srgbClr val="F2F5F8"/>
+                    </a:solidFill>
+                  </a:tcPr>
+                </a:tc>
+              </a:tr>
+              <a:tr h="804672">
+                <a:tc>
+                  <a:txBody>
+                    <a:bodyPr wrap="square"/>
+                    <a:lstStyle/>
+                    <a:p>
+                      <a:r>
+                        <a:rPr sz="950" b="0">
+                          <a:solidFill>
+                            <a:srgbClr val="222222"/>
+                          </a:solidFill>
+                          <a:latin typeface="Yu Gothic"/>
+                        </a:rPr>
+                        <a:t>報告は2部構成</a:t>
+                      </a:r>
+                    </a:p>
+                  </a:txBody>
+                  <a:tcPr marL="54864" marR="54864" marT="18288" marB="18288">
+                    <a:solidFill>
+                      <a:srgbClr val="FFFFFF"/>
+                    </a:solidFill>
+                  </a:tcPr>
+                </a:tc>
+                <a:tc>
+                  <a:txBody>
+                    <a:bodyPr wrap="square"/>
+                    <a:lstStyle/>
+                    <a:p>
+                      <a:r>
+                        <a:rPr sz="950" b="0">
+                          <a:solidFill>
+                            <a:srgbClr val="222222"/>
+                          </a:solidFill>
+                          <a:latin typeface="Yu Gothic"/>
+                        </a:rPr>
+                        <a:t>社長向け＝経営の数字に翻訳（睡眠負債×人数＝損失額）。全社向け＝</a:t>
+                      </a:r>
+                      <a:r>
+                        <a:rPr sz="950" b="1">
+                          <a:solidFill>
+                            <a:srgbClr val="222222"/>
+                          </a:solidFill>
+                          <a:latin typeface="Yu Gothic"/>
+                        </a:rPr>
+                        <a:t>社長本人の口から発表</a:t>
+                      </a:r>
+                      <a:r>
+                        <a:rPr sz="950" b="0">
+                          <a:solidFill>
+                            <a:srgbClr val="222222"/>
+                          </a:solidFill>
+                          <a:latin typeface="Yu Gothic"/>
+                        </a:rPr>
+                        <a:t>（台本・資料は小林が用意）</a:t>
+                      </a:r>
+                    </a:p>
+                  </a:txBody>
+                  <a:tcPr marL="54864" marR="54864" marT="18288" marB="18288">
+                    <a:solidFill>
+                      <a:srgbClr val="FFFFFF"/>
+                    </a:solidFill>
+                  </a:tcPr>
+                </a:tc>
+                <a:tc>
+                  <a:txBody>
+                    <a:bodyPr wrap="square"/>
+                    <a:lstStyle/>
+                    <a:p>
+                      <a:r>
+                        <a:rPr sz="950" b="0">
+                          <a:solidFill>
+                            <a:srgbClr val="222222"/>
+                          </a:solidFill>
+                          <a:latin typeface="Yu Gothic"/>
+                        </a:rPr>
+                        <a:t>外部の人間が「会社はこう変わります」と言うと、社長の求心力を下げる。言うのは社長、言わせる準備が小林の仕事</a:t>
+                      </a:r>
+                    </a:p>
+                  </a:txBody>
+                  <a:tcPr marL="54864" marR="54864" marT="18288" marB="18288">
+                    <a:solidFill>
+                      <a:srgbClr val="FFFFFF"/>
+                    </a:solidFill>
+                  </a:tcPr>
+                </a:tc>
+              </a:tr>
+              <a:tr h="804672">
+                <a:tc>
+                  <a:txBody>
+                    <a:bodyPr wrap="square"/>
+                    <a:lstStyle/>
+                    <a:p>
+                      <a:r>
+                        <a:rPr sz="950" b="0">
+                          <a:solidFill>
+                            <a:srgbClr val="222222"/>
+                          </a:solidFill>
+                          <a:latin typeface="Yu Gothic"/>
+                        </a:rPr>
+                        <a:t>測定単体では売らない</a:t>
+                      </a:r>
+                    </a:p>
+                  </a:txBody>
+                  <a:tcPr marL="54864" marR="54864" marT="18288" marB="18288">
+                    <a:solidFill>
+                      <a:srgbClr val="F2F5F8"/>
+                    </a:solidFill>
+                  </a:tcPr>
+                </a:tc>
+                <a:tc>
+                  <a:txBody>
+                    <a:bodyPr wrap="square"/>
+                    <a:lstStyle/>
+                    <a:p>
+                      <a:r>
+                        <a:rPr sz="950" b="0">
+                          <a:solidFill>
+                            <a:srgbClr val="222222"/>
+                          </a:solidFill>
+                          <a:latin typeface="Yu Gothic"/>
+                        </a:rPr>
+                        <a:t>「測る→施策（セミナー・サウナ・寝具）→3ヶ月後に再測定」をセット販売</a:t>
+                      </a:r>
+                    </a:p>
+                  </a:txBody>
+                  <a:tcPr marL="54864" marR="54864" marT="18288" marB="18288">
+                    <a:solidFill>
+                      <a:srgbClr val="F2F5F8"/>
+                    </a:solidFill>
+                  </a:tcPr>
+                </a:tc>
+                <a:tc>
+                  <a:txBody>
+                    <a:bodyPr wrap="square"/>
+                    <a:lstStyle/>
+                    <a:p>
+                      <a:r>
+                        <a:rPr sz="950" b="0">
+                          <a:solidFill>
+                            <a:srgbClr val="222222"/>
+                          </a:solidFill>
+                          <a:latin typeface="Yu Gothic"/>
+                        </a:rPr>
+                        <a:t>アンケートは開けたら閉じられない箱。聞いた後に何も変わらないと、聞く前より満足度が下がる</a:t>
+                      </a:r>
+                    </a:p>
+                  </a:txBody>
+                  <a:tcPr marL="54864" marR="54864" marT="18288" marB="18288">
+                    <a:solidFill>
+                      <a:srgbClr val="F2F5F8"/>
+                    </a:solidFill>
+                  </a:tcPr>
+                </a:tc>
+              </a:tr>
+              <a:tr h="804672">
+                <a:tc>
+                  <a:txBody>
+                    <a:bodyPr wrap="square"/>
+                    <a:lstStyle/>
+                    <a:p>
+                      <a:r>
+                        <a:rPr sz="950" b="0">
+                          <a:solidFill>
+                            <a:srgbClr val="222222"/>
+                          </a:solidFill>
+                          <a:latin typeface="Yu Gothic"/>
+                        </a:rPr>
+                        <a:t>お金の話は福利厚生の形で</a:t>
+                      </a:r>
+                    </a:p>
+                  </a:txBody>
+                  <a:tcPr marL="54864" marR="54864" marT="18288" marB="18288">
+                    <a:solidFill>
+                      <a:srgbClr val="FFFFFF"/>
+                    </a:solidFill>
+                  </a:tcPr>
+                </a:tc>
+                <a:tc>
+                  <a:txBody>
+                    <a:bodyPr wrap="square"/>
+                    <a:lstStyle/>
+                    <a:p>
+                      <a:r>
+                        <a:rPr sz="950" b="0">
+                          <a:solidFill>
+                            <a:srgbClr val="222222"/>
+                          </a:solidFill>
+                          <a:latin typeface="Yu Gothic"/>
+                        </a:rPr>
+                        <a:t>マネーセミナーは「手取りを増やす知恵」として全社員向けに。処遇・給与への言及はしない</a:t>
+                      </a:r>
+                    </a:p>
+                  </a:txBody>
+                  <a:tcPr marL="54864" marR="54864" marT="18288" marB="18288">
+                    <a:solidFill>
+                      <a:srgbClr val="FFFFFF"/>
+                    </a:solidFill>
+                  </a:tcPr>
+                </a:tc>
+                <a:tc>
+                  <a:txBody>
+                    <a:bodyPr wrap="square"/>
+                    <a:lstStyle/>
+                    <a:p>
+                      <a:r>
+                        <a:rPr sz="950" b="0">
+                          <a:solidFill>
+                            <a:srgbClr val="222222"/>
+                          </a:solidFill>
+                          <a:latin typeface="Yu Gothic"/>
+                        </a:rPr>
+                        <a:t>外部者が処遇に踏み込むと労使問題に片足。健康とお金の「一般論の専門家」に徹する</a:t>
+                      </a:r>
+                    </a:p>
+                  </a:txBody>
+                  <a:tcPr marL="54864" marR="54864" marT="18288" marB="18288">
+                    <a:solidFill>
+                      <a:srgbClr val="FFFFFF"/>
+                    </a:solidFill>
+                  </a:tcPr>
+                </a:tc>
+              </a:tr>
+            </a:tbl>
+          </a:graphicData>
+        </a:graphic>
+      </p:graphicFrame>
+      <p:sp>
+        <p:nvSpPr>
+          <p:cNvPr id="6" name="TextBox 5"/>
+          <p:cNvSpPr txBox="1"/>
+          <p:nvPr/>
+        </p:nvSpPr>
+        <p:spPr>
+          <a:xfrm>
+            <a:off x="548640" y="5806440"/>
+            <a:ext cx="11064240" cy="731520"/>
+          </a:xfrm>
+          <a:prstGeom prst="rect">
+            <a:avLst/>
+          </a:prstGeom>
+          <a:noFill/>
+        </p:spPr>
+        <p:txBody>
+          <a:bodyPr wrap="square" anchor="t">
+            <a:spAutoFit/>
+          </a:bodyPr>
+          <a:lstStyle/>
+          <a:p>
+            <a:pPr algn="l"/>
+            <a:r>
+              <a:rPr sz="1400" b="1">
+                <a:solidFill>
+                  <a:srgbClr val="1F3A5F"/>
+                </a:solidFill>
+                <a:latin typeface="Yu Gothic"/>
+              </a:rPr>
+              <a:t>うちも全員アンケートをやった。だから「社員の本音を知るのは怖いけど、知った方が早い」と実体験で言える。</a:t>
+            </a:r>
+          </a:p>
+        </p:txBody>
+      </p:sp>
+    </p:spTree>
+  </p:cSld>
+  <p:clrMapOvr>
+    <a:masterClrMapping/>
+  </p:clrMapOvr>
+</p:sld>
+</file>
+
+<file path=ppt/slides/slide11.xml><?xml version="1.0" encoding="utf-8"?>
+<p:sld xmlns:a="http://schemas.openxmlformats.org/drawingml/2006/main" xmlns:p="http://schemas.openxmlformats.org/presentationml/2006/main" xmlns:r="http://schemas.openxmlformats.org/officeDocument/2006/relationships">
+  <p:cSld>
+    <p:spTree>
+      <p:nvGrpSpPr>
+        <p:cNvPr id="1" name=""/>
+        <p:cNvGrpSpPr/>
+        <p:nvPr/>
+      </p:nvGrpSpPr>
+      <p:grpSpPr/>
+      <p:sp>
+        <p:nvSpPr>
+          <p:cNvPr id="2" name="Rectangle 1"/>
+          <p:cNvSpPr/>
+          <p:nvPr/>
+        </p:nvSpPr>
+        <p:spPr>
+          <a:xfrm>
+            <a:off x="0" y="0"/>
+            <a:ext cx="12191695" cy="868680"/>
+          </a:xfrm>
+          <a:prstGeom prst="rect">
+            <a:avLst/>
+          </a:prstGeom>
+          <a:solidFill>
+            <a:srgbClr val="1F3A5F"/>
+          </a:solidFill>
+          <a:ln>
+            <a:noFill/>
+          </a:ln>
+          <a:effectLst/>
+        </p:spPr>
+        <p:style>
+          <a:lnRef idx="1">
+            <a:schemeClr val="accent1"/>
+          </a:lnRef>
+          <a:fillRef idx="3">
+            <a:schemeClr val="accent1"/>
+          </a:fillRef>
+          <a:effectRef idx="2">
+            <a:schemeClr val="accent1"/>
+          </a:effectRef>
+          <a:fontRef idx="minor">
+            <a:schemeClr val="lt1"/>
+          </a:fontRef>
+        </p:style>
+        <p:txBody>
+          <a:bodyPr rtlCol="0" anchor="ctr"/>
+          <a:lstStyle/>
+          <a:p>
+            <a:pPr algn="ctr"/>
+          </a:p>
+        </p:txBody>
+      </p:sp>
+      <p:sp>
+        <p:nvSpPr>
+          <p:cNvPr id="3" name="TextBox 2"/>
+          <p:cNvSpPr txBox="1"/>
+          <p:nvPr/>
+        </p:nvSpPr>
+        <p:spPr>
+          <a:xfrm>
+            <a:off x="457200" y="109728"/>
+            <a:ext cx="11247120" cy="640080"/>
+          </a:xfrm>
+          <a:prstGeom prst="rect">
+            <a:avLst/>
+          </a:prstGeom>
+          <a:noFill/>
+        </p:spPr>
+        <p:txBody>
+          <a:bodyPr wrap="square" anchor="ctr">
+            <a:spAutoFit/>
+          </a:bodyPr>
+          <a:lstStyle/>
+          <a:p>
+            <a:pPr algn="l"/>
+            <a:r>
+              <a:rPr sz="2200" b="1">
+                <a:solidFill>
+                  <a:srgbClr val="9FC5A0"/>
+                </a:solidFill>
+                <a:latin typeface="Yu Gothic"/>
+              </a:rPr>
+              <a:t>10  </a:t>
+            </a:r>
+            <a:r>
+              <a:rPr sz="2200" b="1">
+                <a:solidFill>
+                  <a:srgbClr val="FFFFFF"/>
+                </a:solidFill>
+                <a:latin typeface="Yu Gothic"/>
+              </a:rPr>
               <a:t>睡眠計測の実務 ―「測って、施策して、また測る」</a:t>
             </a:r>
           </a:p>
@@ -3769,7 +4399,7 @@
 </p:sld>
 </file>
 
-<file path=ppt/slides/slide11.xml><?xml version="1.0" encoding="utf-8"?>
+<file path=ppt/slides/slide12.xml><?xml version="1.0" encoding="utf-8"?>
 <p:sld xmlns:a="http://schemas.openxmlformats.org/drawingml/2006/main" xmlns:p="http://schemas.openxmlformats.org/presentationml/2006/main" xmlns:r="http://schemas.openxmlformats.org/officeDocument/2006/relationships">
   <p:cSld>
     <p:spTree>
@@ -3853,7 +4483,7 @@
                 </a:solidFill>
                 <a:latin typeface="Yu Gothic"/>
               </a:rPr>
-              <a:t>10  </a:t>
+              <a:t>11  </a:t>
             </a:r>
             <a:r>
               <a:rPr sz="2200" b="1">
@@ -4368,7 +4998,7 @@
 </p:sld>
 </file>
 
-<file path=ppt/slides/slide12.xml><?xml version="1.0" encoding="utf-8"?>
+<file path=ppt/slides/slide13.xml><?xml version="1.0" encoding="utf-8"?>
 <p:sld xmlns:a="http://schemas.openxmlformats.org/drawingml/2006/main" xmlns:p="http://schemas.openxmlformats.org/presentationml/2006/main" xmlns:r="http://schemas.openxmlformats.org/officeDocument/2006/relationships">
   <p:cSld>
     <p:spTree>
@@ -4452,7 +5082,7 @@
                 </a:solidFill>
                 <a:latin typeface="Yu Gothic"/>
               </a:rPr>
-              <a:t>11  </a:t>
+              <a:t>12  </a:t>
             </a:r>
             <a:r>
               <a:rPr sz="2200" b="1">
@@ -4774,7 +5404,7 @@
 </p:sld>
 </file>
 
-<file path=ppt/slides/slide13.xml><?xml version="1.0" encoding="utf-8"?>
+<file path=ppt/slides/slide14.xml><?xml version="1.0" encoding="utf-8"?>
 <p:sld xmlns:a="http://schemas.openxmlformats.org/drawingml/2006/main" xmlns:p="http://schemas.openxmlformats.org/presentationml/2006/main" xmlns:r="http://schemas.openxmlformats.org/officeDocument/2006/relationships">
   <p:cSld>
     <p:spTree>
@@ -4858,7 +5488,7 @@
                 </a:solidFill>
                 <a:latin typeface="Yu Gothic"/>
               </a:rPr>
-              <a:t>12  </a:t>
+              <a:t>13  </a:t>
             </a:r>
             <a:r>
               <a:rPr sz="2200" b="1">
@@ -5299,7 +5929,7 @@
 </p:sld>
 </file>
 
-<file path=ppt/slides/slide14.xml><?xml version="1.0" encoding="utf-8"?>
+<file path=ppt/slides/slide15.xml><?xml version="1.0" encoding="utf-8"?>
 <p:sld xmlns:a="http://schemas.openxmlformats.org/drawingml/2006/main" xmlns:p="http://schemas.openxmlformats.org/presentationml/2006/main" xmlns:r="http://schemas.openxmlformats.org/officeDocument/2006/relationships">
   <p:cSld>
     <p:spTree>
@@ -5383,7 +6013,7 @@
                 </a:solidFill>
                 <a:latin typeface="Yu Gothic"/>
               </a:rPr>
-              <a:t>13  </a:t>
+              <a:t>14  </a:t>
             </a:r>
             <a:r>
               <a:rPr sz="2200" b="1">
@@ -5716,7 +6346,7 @@
 </p:sld>
 </file>
 
-<file path=ppt/slides/slide15.xml><?xml version="1.0" encoding="utf-8"?>
+<file path=ppt/slides/slide16.xml><?xml version="1.0" encoding="utf-8"?>
 <p:sld xmlns:a="http://schemas.openxmlformats.org/drawingml/2006/main" xmlns:p="http://schemas.openxmlformats.org/presentationml/2006/main" xmlns:r="http://schemas.openxmlformats.org/officeDocument/2006/relationships">
   <p:cSld>
     <p:spTree>

--- a/wellness-business-plan/slides/ウェルネス事業計画_最終版v4_スライド.pptx
+++ b/wellness-business-plan/slides/ウェルネス事業計画_最終版v4_スライド.pptx
@@ -21,6 +21,7 @@
     <p:sldId id="269" r:id="rId20"/>
     <p:sldId id="270" r:id="rId21"/>
     <p:sldId id="271" r:id="rId22"/>
+    <p:sldId id="272" r:id="rId23"/>
   </p:sldIdLst>
   <p:sldSz cx="12191695" cy="6858000" type="screen4x3"/>
   <p:notesSz cx="6858000" cy="9144000"/>
@@ -3421,21 +3422,65 @@
                 </a:solidFill>
                 <a:latin typeface="Yu Gothic"/>
               </a:rPr>
-              <a:t>入口の型 ― 「社員の気持ちを知る」から始める</a:t>
-            </a:r>
-          </a:p>
-        </p:txBody>
-      </p:sp>
-      <p:sp>
-        <p:nvSpPr>
-          <p:cNvPr id="4" name="TextBox 3"/>
+              <a:t>売り方 ― 認定済みには「回収」、未着手には「健康経営と言わない」</a:t>
+            </a:r>
+          </a:p>
+        </p:txBody>
+      </p:sp>
+      <p:sp>
+        <p:nvSpPr>
+          <p:cNvPr id="4" name="Rectangle 3"/>
+          <p:cNvSpPr/>
+          <p:nvPr/>
+        </p:nvSpPr>
+        <p:spPr>
+          <a:xfrm>
+            <a:off x="548640" y="1280160"/>
+            <a:ext cx="5394960" cy="4572000"/>
+          </a:xfrm>
+          <a:prstGeom prst="rect">
+            <a:avLst/>
+          </a:prstGeom>
+          <a:solidFill>
+            <a:srgbClr val="E8F0E9"/>
+          </a:solidFill>
+          <a:ln>
+            <a:noFill/>
+          </a:ln>
+          <a:effectLst/>
+        </p:spPr>
+        <p:style>
+          <a:lnRef idx="1">
+            <a:schemeClr val="accent1"/>
+          </a:lnRef>
+          <a:fillRef idx="3">
+            <a:schemeClr val="accent1"/>
+          </a:fillRef>
+          <a:effectRef idx="2">
+            <a:schemeClr val="accent1"/>
+          </a:effectRef>
+          <a:fontRef idx="minor">
+            <a:schemeClr val="lt1"/>
+          </a:fontRef>
+        </p:style>
+        <p:txBody>
+          <a:bodyPr rtlCol="0" anchor="ctr"/>
+          <a:lstStyle/>
+          <a:p>
+            <a:pPr algn="ctr"/>
+          </a:p>
+        </p:txBody>
+      </p:sp>
+      <p:sp>
+        <p:nvSpPr>
+          <p:cNvPr id="5" name="TextBox 4"/>
           <p:cNvSpPr txBox="1"/>
           <p:nvPr/>
         </p:nvSpPr>
         <p:spPr>
           <a:xfrm>
-            <a:off x="502920" y="896112"/>
-            <a:ext cx="11247120" cy="365760"/>
+            <a:off x="777240" y="1417320"/>
+            <a:ext cx="4937760" cy="4297680"/>
           </a:xfrm>
           <a:prstGeom prst="rect">
             <a:avLst/>
@@ -3450,480 +3495,167 @@
           <a:p>
             <a:pPr algn="l"/>
             <a:r>
-              <a:rPr sz="1200" b="0">
+              <a:rPr sz="1500" b="1">
+                <a:solidFill>
+                  <a:srgbClr val="2E7D32"/>
+                </a:solidFill>
+                <a:latin typeface="Yu Gothic"/>
+              </a:rPr>
+              <a:t>A：認定済み企業（679社）</a:t>
+            </a:r>
+          </a:p>
+          <a:p>
+            <a:pPr algn="l"/>
+            <a:r>
+              <a:rPr sz="1300" b="1">
+                <a:solidFill>
+                  <a:srgbClr val="1F3A5F"/>
+                </a:solidFill>
+                <a:latin typeface="Yu Gothic"/>
+              </a:rPr>
+              <a:t>「取った認定を回収しましょう」</a:t>
+            </a:r>
+          </a:p>
+          <a:p>
+            <a:pPr algn="l"/>
+            <a:r>
+              <a:rPr sz="500" b="0">
                 <a:solidFill>
                   <a:srgbClr val="666666"/>
                 </a:solidFill>
                 <a:latin typeface="Yu Gothic"/>
               </a:rPr>
-              <a:t>立ち位置は「社長の味方」。ただし社員の前では「会社と皆さんの間の通訳」— 言葉を使い分ける</a:t>
-            </a:r>
-          </a:p>
-        </p:txBody>
-      </p:sp>
-      <p:graphicFrame>
-        <p:nvGraphicFramePr>
-          <p:cNvPr id="5" name="Table 4"/>
-          <p:cNvGraphicFramePr>
-            <a:graphicFrameLocks noGrp="1"/>
-          </p:cNvGraphicFramePr>
+              <a:t/>
+            </a:r>
+          </a:p>
+          <a:p>
+            <a:pPr algn="l"/>
+            <a:r>
+              <a:rPr sz="1150" b="0">
+                <a:solidFill>
+                  <a:srgbClr val="222222"/>
+                </a:solidFill>
+                <a:latin typeface="Yu Gothic"/>
+              </a:rPr>
+              <a:t>痛み：認定は取ったが変わらない／毎年の申請が重い／施策の弾切れ／社員が乗ってこない</a:t>
+            </a:r>
+          </a:p>
+          <a:p>
+            <a:pPr algn="l"/>
+            <a:r>
+              <a:rPr sz="500" b="0">
+                <a:solidFill>
+                  <a:srgbClr val="666666"/>
+                </a:solidFill>
+                <a:latin typeface="Yu Gothic"/>
+              </a:rPr>
+              <a:t/>
+            </a:r>
+          </a:p>
+          <a:p>
+            <a:pPr algn="l"/>
+            <a:r>
+              <a:rPr sz="1150" b="1">
+                <a:solidFill>
+                  <a:srgbClr val="222222"/>
+                </a:solidFill>
+                <a:latin typeface="Yu Gothic"/>
+              </a:rPr>
+              <a:t>武器：認定調査票の項目×セミナー6本の対応表——「今年の申請書の実施実績、これで全部埋まります」</a:t>
+            </a:r>
+          </a:p>
+          <a:p>
+            <a:pPr algn="l"/>
+            <a:r>
+              <a:rPr sz="500" b="0">
+                <a:solidFill>
+                  <a:srgbClr val="666666"/>
+                </a:solidFill>
+                <a:latin typeface="Yu Gothic"/>
+              </a:rPr>
+              <a:t/>
+            </a:r>
+          </a:p>
+          <a:p>
+            <a:pPr algn="l"/>
+            <a:r>
+              <a:rPr sz="1150" b="0">
+                <a:solidFill>
+                  <a:srgbClr val="222222"/>
+                </a:solidFill>
+                <a:latin typeface="Yu Gothic"/>
+              </a:rPr>
+              <a:t>順番：社員割引カード→サウナデー→年間パック→施工</a:t>
+            </a:r>
+          </a:p>
+          <a:p>
+            <a:pPr algn="l"/>
+            <a:r>
+              <a:rPr sz="1100" b="0">
+                <a:solidFill>
+                  <a:srgbClr val="666666"/>
+                </a:solidFill>
+                <a:latin typeface="Yu Gothic"/>
+              </a:rPr>
+              <a:t>30秒トーク：「認定企業さんを回っていると皆さんおっしゃるんです——取ったはいいけど何も変わらないと。実はうちも同じでした」</a:t>
+            </a:r>
+          </a:p>
+        </p:txBody>
+      </p:sp>
+      <p:sp>
+        <p:nvSpPr>
+          <p:cNvPr id="6" name="Rectangle 5"/>
+          <p:cNvSpPr/>
           <p:nvPr/>
-        </p:nvGraphicFramePr>
-        <p:xfrm>
-          <a:off x="548640" y="1417320"/>
-          <a:ext cx="11064237" cy="4828032"/>
-        </p:xfrm>
-        <a:graphic>
-          <a:graphicData uri="http://schemas.openxmlformats.org/drawingml/2006/table">
-            <a:tbl>
-              <a:tblPr firstRow="1" bandRow="1">
-                <a:tableStyleId>{5C22544A-7EE6-4342-B048-85BDC9FD1C3A}</a:tableStyleId>
-              </a:tblPr>
-              <a:tblGrid>
-                <a:gridCol w="2194559"/>
-                <a:gridCol w="4571999"/>
-                <a:gridCol w="4297679"/>
-              </a:tblGrid>
-              <a:tr h="804672">
-                <a:tc>
-                  <a:txBody>
-                    <a:bodyPr wrap="square"/>
-                    <a:lstStyle/>
-                    <a:p>
-                      <a:r>
-                        <a:rPr sz="1100" b="1">
-                          <a:solidFill>
-                            <a:srgbClr val="FFFFFF"/>
-                          </a:solidFill>
-                          <a:latin typeface="Yu Gothic"/>
-                        </a:rPr>
-                        <a:t>原則</a:t>
-                      </a:r>
-                    </a:p>
-                  </a:txBody>
-                  <a:tcPr marL="54864" marR="54864" marT="18288" marB="18288">
-                    <a:solidFill>
-                      <a:srgbClr val="1F3A5F"/>
-                    </a:solidFill>
-                  </a:tcPr>
-                </a:tc>
-                <a:tc>
-                  <a:txBody>
-                    <a:bodyPr wrap="square"/>
-                    <a:lstStyle/>
-                    <a:p>
-                      <a:r>
-                        <a:rPr sz="1100" b="1">
-                          <a:solidFill>
-                            <a:srgbClr val="FFFFFF"/>
-                          </a:solidFill>
-                          <a:latin typeface="Yu Gothic"/>
-                        </a:rPr>
-                        <a:t>やり方</a:t>
-                      </a:r>
-                    </a:p>
-                  </a:txBody>
-                  <a:tcPr marL="54864" marR="54864" marT="18288" marB="18288">
-                    <a:solidFill>
-                      <a:srgbClr val="1F3A5F"/>
-                    </a:solidFill>
-                  </a:tcPr>
-                </a:tc>
-                <a:tc>
-                  <a:txBody>
-                    <a:bodyPr wrap="square"/>
-                    <a:lstStyle/>
-                    <a:p>
-                      <a:r>
-                        <a:rPr sz="1100" b="1">
-                          <a:solidFill>
-                            <a:srgbClr val="FFFFFF"/>
-                          </a:solidFill>
-                          <a:latin typeface="Yu Gothic"/>
-                        </a:rPr>
-                        <a:t>なぜ（外すと起きる失敗）</a:t>
-                      </a:r>
-                    </a:p>
-                  </a:txBody>
-                  <a:tcPr marL="54864" marR="54864" marT="18288" marB="18288">
-                    <a:solidFill>
-                      <a:srgbClr val="1F3A5F"/>
-                    </a:solidFill>
-                  </a:tcPr>
-                </a:tc>
-              </a:tr>
-              <a:tr h="804672">
-                <a:tc>
-                  <a:txBody>
-                    <a:bodyPr wrap="square"/>
-                    <a:lstStyle/>
-                    <a:p>
-                      <a:r>
-                        <a:rPr sz="950" b="0">
-                          <a:solidFill>
-                            <a:srgbClr val="222222"/>
-                          </a:solidFill>
-                          <a:latin typeface="Yu Gothic"/>
-                        </a:rPr>
-                        <a:t>アンケートは新設しない</a:t>
-                      </a:r>
-                    </a:p>
-                  </a:txBody>
-                  <a:tcPr marL="54864" marR="54864" marT="18288" marB="18288">
-                    <a:solidFill>
-                      <a:srgbClr val="FFFFFF"/>
-                    </a:solidFill>
-                  </a:tcPr>
-                </a:tc>
-                <a:tc>
-                  <a:txBody>
-                    <a:bodyPr wrap="square"/>
-                    <a:lstStyle/>
-                    <a:p>
-                      <a:r>
-                        <a:rPr sz="950" b="0">
-                          <a:solidFill>
-                            <a:srgbClr val="222222"/>
-                          </a:solidFill>
-                          <a:latin typeface="Yu Gothic"/>
-                        </a:rPr>
-                        <a:t>睡眠偏差値＋カスタム設問3〜5問（満足度・お金の意識）に一本化</a:t>
-                      </a:r>
-                    </a:p>
-                  </a:txBody>
-                  <a:tcPr marL="54864" marR="54864" marT="18288" marB="18288">
-                    <a:solidFill>
-                      <a:srgbClr val="FFFFFF"/>
-                    </a:solidFill>
-                  </a:tcPr>
-                </a:tc>
-                <a:tc>
-                  <a:txBody>
-                    <a:bodyPr wrap="square"/>
-                    <a:lstStyle/>
-                    <a:p>
-                      <a:r>
-                        <a:rPr sz="950" b="0">
-                          <a:solidFill>
-                            <a:srgbClr val="222222"/>
-                          </a:solidFill>
-                          <a:latin typeface="Yu Gothic"/>
-                        </a:rPr>
-                        <a:t>汎用サーベイはコモディティ（月300円/人のツール多数）で差別化ゼロ。二重測定は「またアンケートか」のサーベイ疲れを生む</a:t>
-                      </a:r>
-                    </a:p>
-                  </a:txBody>
-                  <a:tcPr marL="54864" marR="54864" marT="18288" marB="18288">
-                    <a:solidFill>
-                      <a:srgbClr val="FFFFFF"/>
-                    </a:solidFill>
-                  </a:tcPr>
-                </a:tc>
-              </a:tr>
-              <a:tr h="804672">
-                <a:tc>
-                  <a:txBody>
-                    <a:bodyPr wrap="square"/>
-                    <a:lstStyle/>
-                    <a:p>
-                      <a:r>
-                        <a:rPr sz="950" b="0">
-                          <a:solidFill>
-                            <a:srgbClr val="222222"/>
-                          </a:solidFill>
-                          <a:latin typeface="Yu Gothic"/>
-                        </a:rPr>
-                        <a:t>匿名・外部集計を明示</a:t>
-                      </a:r>
-                    </a:p>
-                  </a:txBody>
-                  <a:tcPr marL="54864" marR="54864" marT="18288" marB="18288">
-                    <a:solidFill>
-                      <a:srgbClr val="F2F5F8"/>
-                    </a:solidFill>
-                  </a:tcPr>
-                </a:tc>
-                <a:tc>
-                  <a:txBody>
-                    <a:bodyPr wrap="square"/>
-                    <a:lstStyle/>
-                    <a:p>
-                      <a:r>
-                        <a:rPr sz="950" b="0">
-                          <a:solidFill>
-                            <a:srgbClr val="222222"/>
-                          </a:solidFill>
-                          <a:latin typeface="Yu Gothic"/>
-                        </a:rPr>
-                        <a:t>「回答は光和が預かり、個人が特定される形で社長には渡りません」と宣言</a:t>
-                      </a:r>
-                    </a:p>
-                  </a:txBody>
-                  <a:tcPr marL="54864" marR="54864" marT="18288" marB="18288">
-                    <a:solidFill>
-                      <a:srgbClr val="F2F5F8"/>
-                    </a:solidFill>
-                  </a:tcPr>
-                </a:tc>
-                <a:tc>
-                  <a:txBody>
-                    <a:bodyPr wrap="square"/>
-                    <a:lstStyle/>
-                    <a:p>
-                      <a:r>
-                        <a:rPr sz="950" b="0">
-                          <a:solidFill>
-                            <a:srgbClr val="222222"/>
-                          </a:solidFill>
-                          <a:latin typeface="Yu Gothic"/>
-                        </a:rPr>
-                        <a:t>社員から見れば小林は「会社側の人」。匿名の担保がないと本音は書かれず、データが嘘になる</a:t>
-                      </a:r>
-                    </a:p>
-                  </a:txBody>
-                  <a:tcPr marL="54864" marR="54864" marT="18288" marB="18288">
-                    <a:solidFill>
-                      <a:srgbClr val="F2F5F8"/>
-                    </a:solidFill>
-                  </a:tcPr>
-                </a:tc>
-              </a:tr>
-              <a:tr h="804672">
-                <a:tc>
-                  <a:txBody>
-                    <a:bodyPr wrap="square"/>
-                    <a:lstStyle/>
-                    <a:p>
-                      <a:r>
-                        <a:rPr sz="950" b="0">
-                          <a:solidFill>
-                            <a:srgbClr val="222222"/>
-                          </a:solidFill>
-                          <a:latin typeface="Yu Gothic"/>
-                        </a:rPr>
-                        <a:t>報告は2部構成</a:t>
-                      </a:r>
-                    </a:p>
-                  </a:txBody>
-                  <a:tcPr marL="54864" marR="54864" marT="18288" marB="18288">
-                    <a:solidFill>
-                      <a:srgbClr val="FFFFFF"/>
-                    </a:solidFill>
-                  </a:tcPr>
-                </a:tc>
-                <a:tc>
-                  <a:txBody>
-                    <a:bodyPr wrap="square"/>
-                    <a:lstStyle/>
-                    <a:p>
-                      <a:r>
-                        <a:rPr sz="950" b="0">
-                          <a:solidFill>
-                            <a:srgbClr val="222222"/>
-                          </a:solidFill>
-                          <a:latin typeface="Yu Gothic"/>
-                        </a:rPr>
-                        <a:t>社長向け＝経営の数字に翻訳（睡眠負債×人数＝損失額）。全社向け＝</a:t>
-                      </a:r>
-                      <a:r>
-                        <a:rPr sz="950" b="1">
-                          <a:solidFill>
-                            <a:srgbClr val="222222"/>
-                          </a:solidFill>
-                          <a:latin typeface="Yu Gothic"/>
-                        </a:rPr>
-                        <a:t>社長本人の口から発表</a:t>
-                      </a:r>
-                      <a:r>
-                        <a:rPr sz="950" b="0">
-                          <a:solidFill>
-                            <a:srgbClr val="222222"/>
-                          </a:solidFill>
-                          <a:latin typeface="Yu Gothic"/>
-                        </a:rPr>
-                        <a:t>（台本・資料は小林が用意）</a:t>
-                      </a:r>
-                    </a:p>
-                  </a:txBody>
-                  <a:tcPr marL="54864" marR="54864" marT="18288" marB="18288">
-                    <a:solidFill>
-                      <a:srgbClr val="FFFFFF"/>
-                    </a:solidFill>
-                  </a:tcPr>
-                </a:tc>
-                <a:tc>
-                  <a:txBody>
-                    <a:bodyPr wrap="square"/>
-                    <a:lstStyle/>
-                    <a:p>
-                      <a:r>
-                        <a:rPr sz="950" b="0">
-                          <a:solidFill>
-                            <a:srgbClr val="222222"/>
-                          </a:solidFill>
-                          <a:latin typeface="Yu Gothic"/>
-                        </a:rPr>
-                        <a:t>外部の人間が「会社はこう変わります」と言うと、社長の求心力を下げる。言うのは社長、言わせる準備が小林の仕事</a:t>
-                      </a:r>
-                    </a:p>
-                  </a:txBody>
-                  <a:tcPr marL="54864" marR="54864" marT="18288" marB="18288">
-                    <a:solidFill>
-                      <a:srgbClr val="FFFFFF"/>
-                    </a:solidFill>
-                  </a:tcPr>
-                </a:tc>
-              </a:tr>
-              <a:tr h="804672">
-                <a:tc>
-                  <a:txBody>
-                    <a:bodyPr wrap="square"/>
-                    <a:lstStyle/>
-                    <a:p>
-                      <a:r>
-                        <a:rPr sz="950" b="0">
-                          <a:solidFill>
-                            <a:srgbClr val="222222"/>
-                          </a:solidFill>
-                          <a:latin typeface="Yu Gothic"/>
-                        </a:rPr>
-                        <a:t>測定単体では売らない</a:t>
-                      </a:r>
-                    </a:p>
-                  </a:txBody>
-                  <a:tcPr marL="54864" marR="54864" marT="18288" marB="18288">
-                    <a:solidFill>
-                      <a:srgbClr val="F2F5F8"/>
-                    </a:solidFill>
-                  </a:tcPr>
-                </a:tc>
-                <a:tc>
-                  <a:txBody>
-                    <a:bodyPr wrap="square"/>
-                    <a:lstStyle/>
-                    <a:p>
-                      <a:r>
-                        <a:rPr sz="950" b="0">
-                          <a:solidFill>
-                            <a:srgbClr val="222222"/>
-                          </a:solidFill>
-                          <a:latin typeface="Yu Gothic"/>
-                        </a:rPr>
-                        <a:t>「測る→施策（セミナー・サウナ・寝具）→3ヶ月後に再測定」をセット販売</a:t>
-                      </a:r>
-                    </a:p>
-                  </a:txBody>
-                  <a:tcPr marL="54864" marR="54864" marT="18288" marB="18288">
-                    <a:solidFill>
-                      <a:srgbClr val="F2F5F8"/>
-                    </a:solidFill>
-                  </a:tcPr>
-                </a:tc>
-                <a:tc>
-                  <a:txBody>
-                    <a:bodyPr wrap="square"/>
-                    <a:lstStyle/>
-                    <a:p>
-                      <a:r>
-                        <a:rPr sz="950" b="0">
-                          <a:solidFill>
-                            <a:srgbClr val="222222"/>
-                          </a:solidFill>
-                          <a:latin typeface="Yu Gothic"/>
-                        </a:rPr>
-                        <a:t>アンケートは開けたら閉じられない箱。聞いた後に何も変わらないと、聞く前より満足度が下がる</a:t>
-                      </a:r>
-                    </a:p>
-                  </a:txBody>
-                  <a:tcPr marL="54864" marR="54864" marT="18288" marB="18288">
-                    <a:solidFill>
-                      <a:srgbClr val="F2F5F8"/>
-                    </a:solidFill>
-                  </a:tcPr>
-                </a:tc>
-              </a:tr>
-              <a:tr h="804672">
-                <a:tc>
-                  <a:txBody>
-                    <a:bodyPr wrap="square"/>
-                    <a:lstStyle/>
-                    <a:p>
-                      <a:r>
-                        <a:rPr sz="950" b="0">
-                          <a:solidFill>
-                            <a:srgbClr val="222222"/>
-                          </a:solidFill>
-                          <a:latin typeface="Yu Gothic"/>
-                        </a:rPr>
-                        <a:t>お金の話は福利厚生の形で</a:t>
-                      </a:r>
-                    </a:p>
-                  </a:txBody>
-                  <a:tcPr marL="54864" marR="54864" marT="18288" marB="18288">
-                    <a:solidFill>
-                      <a:srgbClr val="FFFFFF"/>
-                    </a:solidFill>
-                  </a:tcPr>
-                </a:tc>
-                <a:tc>
-                  <a:txBody>
-                    <a:bodyPr wrap="square"/>
-                    <a:lstStyle/>
-                    <a:p>
-                      <a:r>
-                        <a:rPr sz="950" b="0">
-                          <a:solidFill>
-                            <a:srgbClr val="222222"/>
-                          </a:solidFill>
-                          <a:latin typeface="Yu Gothic"/>
-                        </a:rPr>
-                        <a:t>マネーセミナーは「手取りを増やす知恵」として全社員向けに。処遇・給与への言及はしない</a:t>
-                      </a:r>
-                    </a:p>
-                  </a:txBody>
-                  <a:tcPr marL="54864" marR="54864" marT="18288" marB="18288">
-                    <a:solidFill>
-                      <a:srgbClr val="FFFFFF"/>
-                    </a:solidFill>
-                  </a:tcPr>
-                </a:tc>
-                <a:tc>
-                  <a:txBody>
-                    <a:bodyPr wrap="square"/>
-                    <a:lstStyle/>
-                    <a:p>
-                      <a:r>
-                        <a:rPr sz="950" b="0">
-                          <a:solidFill>
-                            <a:srgbClr val="222222"/>
-                          </a:solidFill>
-                          <a:latin typeface="Yu Gothic"/>
-                        </a:rPr>
-                        <a:t>外部者が処遇に踏み込むと労使問題に片足。健康とお金の「一般論の専門家」に徹する</a:t>
-                      </a:r>
-                    </a:p>
-                  </a:txBody>
-                  <a:tcPr marL="54864" marR="54864" marT="18288" marB="18288">
-                    <a:solidFill>
-                      <a:srgbClr val="FFFFFF"/>
-                    </a:solidFill>
-                  </a:tcPr>
-                </a:tc>
-              </a:tr>
-            </a:tbl>
-          </a:graphicData>
-        </a:graphic>
-      </p:graphicFrame>
-      <p:sp>
-        <p:nvSpPr>
-          <p:cNvPr id="6" name="TextBox 5"/>
+        </p:nvSpPr>
+        <p:spPr>
+          <a:xfrm>
+            <a:off x="6217920" y="1280160"/>
+            <a:ext cx="5394960" cy="4572000"/>
+          </a:xfrm>
+          <a:prstGeom prst="rect">
+            <a:avLst/>
+          </a:prstGeom>
+          <a:solidFill>
+            <a:srgbClr val="F2F5F8"/>
+          </a:solidFill>
+          <a:ln>
+            <a:noFill/>
+          </a:ln>
+          <a:effectLst/>
+        </p:spPr>
+        <p:style>
+          <a:lnRef idx="1">
+            <a:schemeClr val="accent1"/>
+          </a:lnRef>
+          <a:fillRef idx="3">
+            <a:schemeClr val="accent1"/>
+          </a:fillRef>
+          <a:effectRef idx="2">
+            <a:schemeClr val="accent1"/>
+          </a:effectRef>
+          <a:fontRef idx="minor">
+            <a:schemeClr val="lt1"/>
+          </a:fontRef>
+        </p:style>
+        <p:txBody>
+          <a:bodyPr rtlCol="0" anchor="ctr"/>
+          <a:lstStyle/>
+          <a:p>
+            <a:pPr algn="ctr"/>
+          </a:p>
+        </p:txBody>
+      </p:sp>
+      <p:sp>
+        <p:nvSpPr>
+          <p:cNvPr id="7" name="TextBox 6"/>
           <p:cNvSpPr txBox="1"/>
           <p:nvPr/>
         </p:nvSpPr>
         <p:spPr>
           <a:xfrm>
-            <a:off x="548640" y="5806440"/>
-            <a:ext cx="11064240" cy="731520"/>
+            <a:off x="6446520" y="1417320"/>
+            <a:ext cx="4937760" cy="4297680"/>
           </a:xfrm>
           <a:prstGeom prst="rect">
             <a:avLst/>
@@ -3938,13 +3670,121 @@
           <a:p>
             <a:pPr algn="l"/>
             <a:r>
-              <a:rPr sz="1400" b="1">
+              <a:rPr sz="1500" b="1">
                 <a:solidFill>
                   <a:srgbClr val="1F3A5F"/>
                 </a:solidFill>
                 <a:latin typeface="Yu Gothic"/>
               </a:rPr>
-              <a:t>うちも全員アンケートをやった。だから「社員の本音を知るのは怖いけど、知った方が早い」と実体験で言える。</a:t>
+              <a:t>B：未着手層（97%）</a:t>
+            </a:r>
+          </a:p>
+          <a:p>
+            <a:pPr algn="l"/>
+            <a:r>
+              <a:rPr sz="1300" b="1">
+                <a:solidFill>
+                  <a:srgbClr val="C62828"/>
+                </a:solidFill>
+                <a:latin typeface="Yu Gothic"/>
+              </a:rPr>
+              <a:t>「健康経営」と言わずに売る</a:t>
+            </a:r>
+          </a:p>
+          <a:p>
+            <a:pPr algn="l"/>
+            <a:r>
+              <a:rPr sz="500" b="0">
+                <a:solidFill>
+                  <a:srgbClr val="666666"/>
+                </a:solidFill>
+                <a:latin typeface="Yu Gothic"/>
+              </a:rPr>
+              <a:t/>
+            </a:r>
+          </a:p>
+          <a:p>
+            <a:pPr algn="l"/>
+            <a:r>
+              <a:rPr sz="1150" b="0">
+                <a:solidFill>
+                  <a:srgbClr val="222222"/>
+                </a:solidFill>
+                <a:latin typeface="Yu Gothic"/>
+              </a:rPr>
+              <a:t>「求人出しても来ない」→ 求人票に書ける福利厚生パック</a:t>
+            </a:r>
+          </a:p>
+          <a:p>
+            <a:pPr algn="l"/>
+            <a:r>
+              <a:rPr sz="1150" b="0">
+                <a:solidFill>
+                  <a:srgbClr val="222222"/>
+                </a:solidFill>
+                <a:latin typeface="Yu Gothic"/>
+              </a:rPr>
+              <a:t>「若手が辞めた」→ 社員が辞めない会社づくりセミナー</a:t>
+            </a:r>
+          </a:p>
+          <a:p>
+            <a:pPr algn="l"/>
+            <a:r>
+              <a:rPr sz="1150" b="1">
+                <a:solidFill>
+                  <a:srgbClr val="222222"/>
+                </a:solidFill>
+                <a:latin typeface="Yu Gothic"/>
+              </a:rPr>
+              <a:t>「最近眠れなくて」→ 社長の睡眠測定（1〜3万）＝標準初回商品</a:t>
+            </a:r>
+          </a:p>
+          <a:p>
+            <a:pPr algn="l"/>
+            <a:r>
+              <a:rPr sz="1150" b="0">
+                <a:solidFill>
+                  <a:srgbClr val="222222"/>
+                </a:solidFill>
+                <a:latin typeface="Yu Gothic"/>
+              </a:rPr>
+              <a:t>「労災が怖い」→ 睡眠×安全衛生セミナー（安全大会の講師枠）</a:t>
+            </a:r>
+          </a:p>
+          <a:p>
+            <a:pPr algn="l"/>
+            <a:r>
+              <a:rPr sz="500" b="0">
+                <a:solidFill>
+                  <a:srgbClr val="666666"/>
+                </a:solidFill>
+                <a:latin typeface="Yu Gothic"/>
+              </a:rPr>
+              <a:t/>
+            </a:r>
+          </a:p>
+          <a:p>
+            <a:pPr algn="l"/>
+            <a:r>
+              <a:rPr sz="1150" b="1">
+                <a:solidFill>
+                  <a:srgbClr val="C62828"/>
+                </a:solidFill>
+                <a:latin typeface="Yu Gothic"/>
+              </a:rPr>
+              <a:t>使わない言葉：健康経営／ウェルネス／エンゲージメント</a:t>
+            </a:r>
+          </a:p>
+          <a:p>
+            <a:pPr algn="l"/>
+            <a:r>
+              <a:rPr sz="1150" b="0">
+                <a:solidFill>
+                  <a:srgbClr val="222222"/>
+                </a:solidFill>
+                <a:latin typeface="Yu Gothic"/>
+              </a:rPr>
+              <a:t>使う言葉：「求人票に書ける福利厚生」「社長の睡眠の通信簿」</a:t>
             </a:r>
           </a:p>
         </p:txBody>
@@ -4050,6 +3890,635 @@
                 </a:solidFill>
                 <a:latin typeface="Yu Gothic"/>
               </a:rPr>
+              <a:t>入口の型 ― 「社員の気持ちを知る」から始める</a:t>
+            </a:r>
+          </a:p>
+        </p:txBody>
+      </p:sp>
+      <p:sp>
+        <p:nvSpPr>
+          <p:cNvPr id="4" name="TextBox 3"/>
+          <p:cNvSpPr txBox="1"/>
+          <p:nvPr/>
+        </p:nvSpPr>
+        <p:spPr>
+          <a:xfrm>
+            <a:off x="502920" y="896112"/>
+            <a:ext cx="11247120" cy="365760"/>
+          </a:xfrm>
+          <a:prstGeom prst="rect">
+            <a:avLst/>
+          </a:prstGeom>
+          <a:noFill/>
+        </p:spPr>
+        <p:txBody>
+          <a:bodyPr wrap="square" anchor="t">
+            <a:spAutoFit/>
+          </a:bodyPr>
+          <a:lstStyle/>
+          <a:p>
+            <a:pPr algn="l"/>
+            <a:r>
+              <a:rPr sz="1200" b="0">
+                <a:solidFill>
+                  <a:srgbClr val="666666"/>
+                </a:solidFill>
+                <a:latin typeface="Yu Gothic"/>
+              </a:rPr>
+              <a:t>立ち位置は「社長の味方」。ただし社員の前では「会社と皆さんの間の通訳」— 言葉を使い分ける</a:t>
+            </a:r>
+          </a:p>
+        </p:txBody>
+      </p:sp>
+      <p:graphicFrame>
+        <p:nvGraphicFramePr>
+          <p:cNvPr id="5" name="Table 4"/>
+          <p:cNvGraphicFramePr>
+            <a:graphicFrameLocks noGrp="1"/>
+          </p:cNvGraphicFramePr>
+          <p:nvPr/>
+        </p:nvGraphicFramePr>
+        <p:xfrm>
+          <a:off x="548640" y="1417320"/>
+          <a:ext cx="11064237" cy="4828032"/>
+        </p:xfrm>
+        <a:graphic>
+          <a:graphicData uri="http://schemas.openxmlformats.org/drawingml/2006/table">
+            <a:tbl>
+              <a:tblPr firstRow="1" bandRow="1">
+                <a:tableStyleId>{5C22544A-7EE6-4342-B048-85BDC9FD1C3A}</a:tableStyleId>
+              </a:tblPr>
+              <a:tblGrid>
+                <a:gridCol w="2194559"/>
+                <a:gridCol w="4571999"/>
+                <a:gridCol w="4297679"/>
+              </a:tblGrid>
+              <a:tr h="804672">
+                <a:tc>
+                  <a:txBody>
+                    <a:bodyPr wrap="square"/>
+                    <a:lstStyle/>
+                    <a:p>
+                      <a:r>
+                        <a:rPr sz="1100" b="1">
+                          <a:solidFill>
+                            <a:srgbClr val="FFFFFF"/>
+                          </a:solidFill>
+                          <a:latin typeface="Yu Gothic"/>
+                        </a:rPr>
+                        <a:t>原則</a:t>
+                      </a:r>
+                    </a:p>
+                  </a:txBody>
+                  <a:tcPr marL="54864" marR="54864" marT="18288" marB="18288">
+                    <a:solidFill>
+                      <a:srgbClr val="1F3A5F"/>
+                    </a:solidFill>
+                  </a:tcPr>
+                </a:tc>
+                <a:tc>
+                  <a:txBody>
+                    <a:bodyPr wrap="square"/>
+                    <a:lstStyle/>
+                    <a:p>
+                      <a:r>
+                        <a:rPr sz="1100" b="1">
+                          <a:solidFill>
+                            <a:srgbClr val="FFFFFF"/>
+                          </a:solidFill>
+                          <a:latin typeface="Yu Gothic"/>
+                        </a:rPr>
+                        <a:t>やり方</a:t>
+                      </a:r>
+                    </a:p>
+                  </a:txBody>
+                  <a:tcPr marL="54864" marR="54864" marT="18288" marB="18288">
+                    <a:solidFill>
+                      <a:srgbClr val="1F3A5F"/>
+                    </a:solidFill>
+                  </a:tcPr>
+                </a:tc>
+                <a:tc>
+                  <a:txBody>
+                    <a:bodyPr wrap="square"/>
+                    <a:lstStyle/>
+                    <a:p>
+                      <a:r>
+                        <a:rPr sz="1100" b="1">
+                          <a:solidFill>
+                            <a:srgbClr val="FFFFFF"/>
+                          </a:solidFill>
+                          <a:latin typeface="Yu Gothic"/>
+                        </a:rPr>
+                        <a:t>なぜ（外すと起きる失敗）</a:t>
+                      </a:r>
+                    </a:p>
+                  </a:txBody>
+                  <a:tcPr marL="54864" marR="54864" marT="18288" marB="18288">
+                    <a:solidFill>
+                      <a:srgbClr val="1F3A5F"/>
+                    </a:solidFill>
+                  </a:tcPr>
+                </a:tc>
+              </a:tr>
+              <a:tr h="804672">
+                <a:tc>
+                  <a:txBody>
+                    <a:bodyPr wrap="square"/>
+                    <a:lstStyle/>
+                    <a:p>
+                      <a:r>
+                        <a:rPr sz="950" b="0">
+                          <a:solidFill>
+                            <a:srgbClr val="222222"/>
+                          </a:solidFill>
+                          <a:latin typeface="Yu Gothic"/>
+                        </a:rPr>
+                        <a:t>アンケートは新設しない</a:t>
+                      </a:r>
+                    </a:p>
+                  </a:txBody>
+                  <a:tcPr marL="54864" marR="54864" marT="18288" marB="18288">
+                    <a:solidFill>
+                      <a:srgbClr val="FFFFFF"/>
+                    </a:solidFill>
+                  </a:tcPr>
+                </a:tc>
+                <a:tc>
+                  <a:txBody>
+                    <a:bodyPr wrap="square"/>
+                    <a:lstStyle/>
+                    <a:p>
+                      <a:r>
+                        <a:rPr sz="950" b="0">
+                          <a:solidFill>
+                            <a:srgbClr val="222222"/>
+                          </a:solidFill>
+                          <a:latin typeface="Yu Gothic"/>
+                        </a:rPr>
+                        <a:t>睡眠偏差値＋カスタム設問3〜5問（満足度・お金の意識）に一本化</a:t>
+                      </a:r>
+                    </a:p>
+                  </a:txBody>
+                  <a:tcPr marL="54864" marR="54864" marT="18288" marB="18288">
+                    <a:solidFill>
+                      <a:srgbClr val="FFFFFF"/>
+                    </a:solidFill>
+                  </a:tcPr>
+                </a:tc>
+                <a:tc>
+                  <a:txBody>
+                    <a:bodyPr wrap="square"/>
+                    <a:lstStyle/>
+                    <a:p>
+                      <a:r>
+                        <a:rPr sz="950" b="0">
+                          <a:solidFill>
+                            <a:srgbClr val="222222"/>
+                          </a:solidFill>
+                          <a:latin typeface="Yu Gothic"/>
+                        </a:rPr>
+                        <a:t>汎用サーベイはコモディティ（月300円/人のツール多数）で差別化ゼロ。二重測定は「またアンケートか」のサーベイ疲れを生む</a:t>
+                      </a:r>
+                    </a:p>
+                  </a:txBody>
+                  <a:tcPr marL="54864" marR="54864" marT="18288" marB="18288">
+                    <a:solidFill>
+                      <a:srgbClr val="FFFFFF"/>
+                    </a:solidFill>
+                  </a:tcPr>
+                </a:tc>
+              </a:tr>
+              <a:tr h="804672">
+                <a:tc>
+                  <a:txBody>
+                    <a:bodyPr wrap="square"/>
+                    <a:lstStyle/>
+                    <a:p>
+                      <a:r>
+                        <a:rPr sz="950" b="0">
+                          <a:solidFill>
+                            <a:srgbClr val="222222"/>
+                          </a:solidFill>
+                          <a:latin typeface="Yu Gothic"/>
+                        </a:rPr>
+                        <a:t>匿名・外部集計を明示</a:t>
+                      </a:r>
+                    </a:p>
+                  </a:txBody>
+                  <a:tcPr marL="54864" marR="54864" marT="18288" marB="18288">
+                    <a:solidFill>
+                      <a:srgbClr val="F2F5F8"/>
+                    </a:solidFill>
+                  </a:tcPr>
+                </a:tc>
+                <a:tc>
+                  <a:txBody>
+                    <a:bodyPr wrap="square"/>
+                    <a:lstStyle/>
+                    <a:p>
+                      <a:r>
+                        <a:rPr sz="950" b="0">
+                          <a:solidFill>
+                            <a:srgbClr val="222222"/>
+                          </a:solidFill>
+                          <a:latin typeface="Yu Gothic"/>
+                        </a:rPr>
+                        <a:t>「回答は光和が預かり、個人が特定される形で社長には渡りません」と宣言</a:t>
+                      </a:r>
+                    </a:p>
+                  </a:txBody>
+                  <a:tcPr marL="54864" marR="54864" marT="18288" marB="18288">
+                    <a:solidFill>
+                      <a:srgbClr val="F2F5F8"/>
+                    </a:solidFill>
+                  </a:tcPr>
+                </a:tc>
+                <a:tc>
+                  <a:txBody>
+                    <a:bodyPr wrap="square"/>
+                    <a:lstStyle/>
+                    <a:p>
+                      <a:r>
+                        <a:rPr sz="950" b="0">
+                          <a:solidFill>
+                            <a:srgbClr val="222222"/>
+                          </a:solidFill>
+                          <a:latin typeface="Yu Gothic"/>
+                        </a:rPr>
+                        <a:t>社員から見れば小林は「会社側の人」。匿名の担保がないと本音は書かれず、データが嘘になる</a:t>
+                      </a:r>
+                    </a:p>
+                  </a:txBody>
+                  <a:tcPr marL="54864" marR="54864" marT="18288" marB="18288">
+                    <a:solidFill>
+                      <a:srgbClr val="F2F5F8"/>
+                    </a:solidFill>
+                  </a:tcPr>
+                </a:tc>
+              </a:tr>
+              <a:tr h="804672">
+                <a:tc>
+                  <a:txBody>
+                    <a:bodyPr wrap="square"/>
+                    <a:lstStyle/>
+                    <a:p>
+                      <a:r>
+                        <a:rPr sz="950" b="0">
+                          <a:solidFill>
+                            <a:srgbClr val="222222"/>
+                          </a:solidFill>
+                          <a:latin typeface="Yu Gothic"/>
+                        </a:rPr>
+                        <a:t>報告は2部構成</a:t>
+                      </a:r>
+                    </a:p>
+                  </a:txBody>
+                  <a:tcPr marL="54864" marR="54864" marT="18288" marB="18288">
+                    <a:solidFill>
+                      <a:srgbClr val="FFFFFF"/>
+                    </a:solidFill>
+                  </a:tcPr>
+                </a:tc>
+                <a:tc>
+                  <a:txBody>
+                    <a:bodyPr wrap="square"/>
+                    <a:lstStyle/>
+                    <a:p>
+                      <a:r>
+                        <a:rPr sz="950" b="0">
+                          <a:solidFill>
+                            <a:srgbClr val="222222"/>
+                          </a:solidFill>
+                          <a:latin typeface="Yu Gothic"/>
+                        </a:rPr>
+                        <a:t>社長向け＝経営の数字に翻訳（睡眠負債×人数＝損失額）。全社向け＝</a:t>
+                      </a:r>
+                      <a:r>
+                        <a:rPr sz="950" b="1">
+                          <a:solidFill>
+                            <a:srgbClr val="222222"/>
+                          </a:solidFill>
+                          <a:latin typeface="Yu Gothic"/>
+                        </a:rPr>
+                        <a:t>社長本人の口から発表</a:t>
+                      </a:r>
+                      <a:r>
+                        <a:rPr sz="950" b="0">
+                          <a:solidFill>
+                            <a:srgbClr val="222222"/>
+                          </a:solidFill>
+                          <a:latin typeface="Yu Gothic"/>
+                        </a:rPr>
+                        <a:t>（台本・資料は小林が用意）</a:t>
+                      </a:r>
+                    </a:p>
+                  </a:txBody>
+                  <a:tcPr marL="54864" marR="54864" marT="18288" marB="18288">
+                    <a:solidFill>
+                      <a:srgbClr val="FFFFFF"/>
+                    </a:solidFill>
+                  </a:tcPr>
+                </a:tc>
+                <a:tc>
+                  <a:txBody>
+                    <a:bodyPr wrap="square"/>
+                    <a:lstStyle/>
+                    <a:p>
+                      <a:r>
+                        <a:rPr sz="950" b="0">
+                          <a:solidFill>
+                            <a:srgbClr val="222222"/>
+                          </a:solidFill>
+                          <a:latin typeface="Yu Gothic"/>
+                        </a:rPr>
+                        <a:t>外部の人間が「会社はこう変わります」と言うと、社長の求心力を下げる。言うのは社長、言わせる準備が小林の仕事</a:t>
+                      </a:r>
+                    </a:p>
+                  </a:txBody>
+                  <a:tcPr marL="54864" marR="54864" marT="18288" marB="18288">
+                    <a:solidFill>
+                      <a:srgbClr val="FFFFFF"/>
+                    </a:solidFill>
+                  </a:tcPr>
+                </a:tc>
+              </a:tr>
+              <a:tr h="804672">
+                <a:tc>
+                  <a:txBody>
+                    <a:bodyPr wrap="square"/>
+                    <a:lstStyle/>
+                    <a:p>
+                      <a:r>
+                        <a:rPr sz="950" b="0">
+                          <a:solidFill>
+                            <a:srgbClr val="222222"/>
+                          </a:solidFill>
+                          <a:latin typeface="Yu Gothic"/>
+                        </a:rPr>
+                        <a:t>測定単体では売らない</a:t>
+                      </a:r>
+                    </a:p>
+                  </a:txBody>
+                  <a:tcPr marL="54864" marR="54864" marT="18288" marB="18288">
+                    <a:solidFill>
+                      <a:srgbClr val="F2F5F8"/>
+                    </a:solidFill>
+                  </a:tcPr>
+                </a:tc>
+                <a:tc>
+                  <a:txBody>
+                    <a:bodyPr wrap="square"/>
+                    <a:lstStyle/>
+                    <a:p>
+                      <a:r>
+                        <a:rPr sz="950" b="0">
+                          <a:solidFill>
+                            <a:srgbClr val="222222"/>
+                          </a:solidFill>
+                          <a:latin typeface="Yu Gothic"/>
+                        </a:rPr>
+                        <a:t>「測る→施策（セミナー・サウナ・寝具）→3ヶ月後に再測定」をセット販売</a:t>
+                      </a:r>
+                    </a:p>
+                  </a:txBody>
+                  <a:tcPr marL="54864" marR="54864" marT="18288" marB="18288">
+                    <a:solidFill>
+                      <a:srgbClr val="F2F5F8"/>
+                    </a:solidFill>
+                  </a:tcPr>
+                </a:tc>
+                <a:tc>
+                  <a:txBody>
+                    <a:bodyPr wrap="square"/>
+                    <a:lstStyle/>
+                    <a:p>
+                      <a:r>
+                        <a:rPr sz="950" b="0">
+                          <a:solidFill>
+                            <a:srgbClr val="222222"/>
+                          </a:solidFill>
+                          <a:latin typeface="Yu Gothic"/>
+                        </a:rPr>
+                        <a:t>アンケートは開けたら閉じられない箱。聞いた後に何も変わらないと、聞く前より満足度が下がる</a:t>
+                      </a:r>
+                    </a:p>
+                  </a:txBody>
+                  <a:tcPr marL="54864" marR="54864" marT="18288" marB="18288">
+                    <a:solidFill>
+                      <a:srgbClr val="F2F5F8"/>
+                    </a:solidFill>
+                  </a:tcPr>
+                </a:tc>
+              </a:tr>
+              <a:tr h="804672">
+                <a:tc>
+                  <a:txBody>
+                    <a:bodyPr wrap="square"/>
+                    <a:lstStyle/>
+                    <a:p>
+                      <a:r>
+                        <a:rPr sz="950" b="0">
+                          <a:solidFill>
+                            <a:srgbClr val="222222"/>
+                          </a:solidFill>
+                          <a:latin typeface="Yu Gothic"/>
+                        </a:rPr>
+                        <a:t>お金の話は福利厚生の形で</a:t>
+                      </a:r>
+                    </a:p>
+                  </a:txBody>
+                  <a:tcPr marL="54864" marR="54864" marT="18288" marB="18288">
+                    <a:solidFill>
+                      <a:srgbClr val="FFFFFF"/>
+                    </a:solidFill>
+                  </a:tcPr>
+                </a:tc>
+                <a:tc>
+                  <a:txBody>
+                    <a:bodyPr wrap="square"/>
+                    <a:lstStyle/>
+                    <a:p>
+                      <a:r>
+                        <a:rPr sz="950" b="0">
+                          <a:solidFill>
+                            <a:srgbClr val="222222"/>
+                          </a:solidFill>
+                          <a:latin typeface="Yu Gothic"/>
+                        </a:rPr>
+                        <a:t>マネーセミナーは「手取りを増やす知恵」として全社員向けに。処遇・給与への言及はしない</a:t>
+                      </a:r>
+                    </a:p>
+                  </a:txBody>
+                  <a:tcPr marL="54864" marR="54864" marT="18288" marB="18288">
+                    <a:solidFill>
+                      <a:srgbClr val="FFFFFF"/>
+                    </a:solidFill>
+                  </a:tcPr>
+                </a:tc>
+                <a:tc>
+                  <a:txBody>
+                    <a:bodyPr wrap="square"/>
+                    <a:lstStyle/>
+                    <a:p>
+                      <a:r>
+                        <a:rPr sz="950" b="0">
+                          <a:solidFill>
+                            <a:srgbClr val="222222"/>
+                          </a:solidFill>
+                          <a:latin typeface="Yu Gothic"/>
+                        </a:rPr>
+                        <a:t>外部者が処遇に踏み込むと労使問題に片足。健康とお金の「一般論の専門家」に徹する</a:t>
+                      </a:r>
+                    </a:p>
+                  </a:txBody>
+                  <a:tcPr marL="54864" marR="54864" marT="18288" marB="18288">
+                    <a:solidFill>
+                      <a:srgbClr val="FFFFFF"/>
+                    </a:solidFill>
+                  </a:tcPr>
+                </a:tc>
+              </a:tr>
+            </a:tbl>
+          </a:graphicData>
+        </a:graphic>
+      </p:graphicFrame>
+      <p:sp>
+        <p:nvSpPr>
+          <p:cNvPr id="6" name="TextBox 5"/>
+          <p:cNvSpPr txBox="1"/>
+          <p:nvPr/>
+        </p:nvSpPr>
+        <p:spPr>
+          <a:xfrm>
+            <a:off x="548640" y="5806440"/>
+            <a:ext cx="11064240" cy="731520"/>
+          </a:xfrm>
+          <a:prstGeom prst="rect">
+            <a:avLst/>
+          </a:prstGeom>
+          <a:noFill/>
+        </p:spPr>
+        <p:txBody>
+          <a:bodyPr wrap="square" anchor="t">
+            <a:spAutoFit/>
+          </a:bodyPr>
+          <a:lstStyle/>
+          <a:p>
+            <a:pPr algn="l"/>
+            <a:r>
+              <a:rPr sz="1400" b="1">
+                <a:solidFill>
+                  <a:srgbClr val="1F3A5F"/>
+                </a:solidFill>
+                <a:latin typeface="Yu Gothic"/>
+              </a:rPr>
+              <a:t>うちも全員アンケートをやった。だから「社員の本音を知るのは怖いけど、知った方が早い」と実体験で言える。</a:t>
+            </a:r>
+          </a:p>
+        </p:txBody>
+      </p:sp>
+    </p:spTree>
+  </p:cSld>
+  <p:clrMapOvr>
+    <a:masterClrMapping/>
+  </p:clrMapOvr>
+</p:sld>
+</file>
+
+<file path=ppt/slides/slide12.xml><?xml version="1.0" encoding="utf-8"?>
+<p:sld xmlns:a="http://schemas.openxmlformats.org/drawingml/2006/main" xmlns:p="http://schemas.openxmlformats.org/presentationml/2006/main" xmlns:r="http://schemas.openxmlformats.org/officeDocument/2006/relationships">
+  <p:cSld>
+    <p:spTree>
+      <p:nvGrpSpPr>
+        <p:cNvPr id="1" name=""/>
+        <p:cNvGrpSpPr/>
+        <p:nvPr/>
+      </p:nvGrpSpPr>
+      <p:grpSpPr/>
+      <p:sp>
+        <p:nvSpPr>
+          <p:cNvPr id="2" name="Rectangle 1"/>
+          <p:cNvSpPr/>
+          <p:nvPr/>
+        </p:nvSpPr>
+        <p:spPr>
+          <a:xfrm>
+            <a:off x="0" y="0"/>
+            <a:ext cx="12191695" cy="868680"/>
+          </a:xfrm>
+          <a:prstGeom prst="rect">
+            <a:avLst/>
+          </a:prstGeom>
+          <a:solidFill>
+            <a:srgbClr val="1F3A5F"/>
+          </a:solidFill>
+          <a:ln>
+            <a:noFill/>
+          </a:ln>
+          <a:effectLst/>
+        </p:spPr>
+        <p:style>
+          <a:lnRef idx="1">
+            <a:schemeClr val="accent1"/>
+          </a:lnRef>
+          <a:fillRef idx="3">
+            <a:schemeClr val="accent1"/>
+          </a:fillRef>
+          <a:effectRef idx="2">
+            <a:schemeClr val="accent1"/>
+          </a:effectRef>
+          <a:fontRef idx="minor">
+            <a:schemeClr val="lt1"/>
+          </a:fontRef>
+        </p:style>
+        <p:txBody>
+          <a:bodyPr rtlCol="0" anchor="ctr"/>
+          <a:lstStyle/>
+          <a:p>
+            <a:pPr algn="ctr"/>
+          </a:p>
+        </p:txBody>
+      </p:sp>
+      <p:sp>
+        <p:nvSpPr>
+          <p:cNvPr id="3" name="TextBox 2"/>
+          <p:cNvSpPr txBox="1"/>
+          <p:nvPr/>
+        </p:nvSpPr>
+        <p:spPr>
+          <a:xfrm>
+            <a:off x="457200" y="109728"/>
+            <a:ext cx="11247120" cy="640080"/>
+          </a:xfrm>
+          <a:prstGeom prst="rect">
+            <a:avLst/>
+          </a:prstGeom>
+          <a:noFill/>
+        </p:spPr>
+        <p:txBody>
+          <a:bodyPr wrap="square" anchor="ctr">
+            <a:spAutoFit/>
+          </a:bodyPr>
+          <a:lstStyle/>
+          <a:p>
+            <a:pPr algn="l"/>
+            <a:r>
+              <a:rPr sz="2200" b="1">
+                <a:solidFill>
+                  <a:srgbClr val="9FC5A0"/>
+                </a:solidFill>
+                <a:latin typeface="Yu Gothic"/>
+              </a:rPr>
+              <a:t>11  </a:t>
+            </a:r>
+            <a:r>
+              <a:rPr sz="2200" b="1">
+                <a:solidFill>
+                  <a:srgbClr val="FFFFFF"/>
+                </a:solidFill>
+                <a:latin typeface="Yu Gothic"/>
+              </a:rPr>
               <a:t>睡眠計測の実務 ―「測って、施策して、また測る」</a:t>
             </a:r>
           </a:p>
@@ -4399,7 +4868,7 @@
 </p:sld>
 </file>
 
-<file path=ppt/slides/slide12.xml><?xml version="1.0" encoding="utf-8"?>
+<file path=ppt/slides/slide13.xml><?xml version="1.0" encoding="utf-8"?>
 <p:sld xmlns:a="http://schemas.openxmlformats.org/drawingml/2006/main" xmlns:p="http://schemas.openxmlformats.org/presentationml/2006/main" xmlns:r="http://schemas.openxmlformats.org/officeDocument/2006/relationships">
   <p:cSld>
     <p:spTree>
@@ -4483,7 +4952,7 @@
                 </a:solidFill>
                 <a:latin typeface="Yu Gothic"/>
               </a:rPr>
-              <a:t>11  </a:t>
+              <a:t>12  </a:t>
             </a:r>
             <a:r>
               <a:rPr sz="2200" b="1">
@@ -4998,7 +5467,7 @@
 </p:sld>
 </file>
 
-<file path=ppt/slides/slide13.xml><?xml version="1.0" encoding="utf-8"?>
+<file path=ppt/slides/slide14.xml><?xml version="1.0" encoding="utf-8"?>
 <p:sld xmlns:a="http://schemas.openxmlformats.org/drawingml/2006/main" xmlns:p="http://schemas.openxmlformats.org/presentationml/2006/main" xmlns:r="http://schemas.openxmlformats.org/officeDocument/2006/relationships">
   <p:cSld>
     <p:spTree>
@@ -5082,7 +5551,7 @@
                 </a:solidFill>
                 <a:latin typeface="Yu Gothic"/>
               </a:rPr>
-              <a:t>12  </a:t>
+              <a:t>13  </a:t>
             </a:r>
             <a:r>
               <a:rPr sz="2200" b="1">
@@ -5404,7 +5873,7 @@
 </p:sld>
 </file>
 
-<file path=ppt/slides/slide14.xml><?xml version="1.0" encoding="utf-8"?>
+<file path=ppt/slides/slide15.xml><?xml version="1.0" encoding="utf-8"?>
 <p:sld xmlns:a="http://schemas.openxmlformats.org/drawingml/2006/main" xmlns:p="http://schemas.openxmlformats.org/presentationml/2006/main" xmlns:r="http://schemas.openxmlformats.org/officeDocument/2006/relationships">
   <p:cSld>
     <p:spTree>
@@ -5488,7 +5957,7 @@
                 </a:solidFill>
                 <a:latin typeface="Yu Gothic"/>
               </a:rPr>
-              <a:t>13  </a:t>
+              <a:t>14  </a:t>
             </a:r>
             <a:r>
               <a:rPr sz="2200" b="1">
@@ -5929,7 +6398,7 @@
 </p:sld>
 </file>
 
-<file path=ppt/slides/slide15.xml><?xml version="1.0" encoding="utf-8"?>
+<file path=ppt/slides/slide16.xml><?xml version="1.0" encoding="utf-8"?>
 <p:sld xmlns:a="http://schemas.openxmlformats.org/drawingml/2006/main" xmlns:p="http://schemas.openxmlformats.org/presentationml/2006/main" xmlns:r="http://schemas.openxmlformats.org/officeDocument/2006/relationships">
   <p:cSld>
     <p:spTree>
@@ -6013,7 +6482,7 @@
                 </a:solidFill>
                 <a:latin typeface="Yu Gothic"/>
               </a:rPr>
-              <a:t>14  </a:t>
+              <a:t>15  </a:t>
             </a:r>
             <a:r>
               <a:rPr sz="2200" b="1">
@@ -6346,7 +6815,7 @@
 </p:sld>
 </file>
 
-<file path=ppt/slides/slide16.xml><?xml version="1.0" encoding="utf-8"?>
+<file path=ppt/slides/slide17.xml><?xml version="1.0" encoding="utf-8"?>
 <p:sld xmlns:a="http://schemas.openxmlformats.org/drawingml/2006/main" xmlns:p="http://schemas.openxmlformats.org/presentationml/2006/main" xmlns:r="http://schemas.openxmlformats.org/officeDocument/2006/relationships">
   <p:cSld>
     <p:spTree>
@@ -7287,7 +7756,7 @@
                 </a:solidFill>
                 <a:latin typeface="Yu Gothic"/>
               </a:rPr>
-              <a:t>なぜ認定済み企業を狙うのか ①</a:t>
+              <a:t>この事業の原点 ― 理念との接続</a:t>
             </a:r>
           </a:p>
         </p:txBody>
@@ -7322,22 +7791,240 @@
                 </a:solidFill>
                 <a:latin typeface="Yu Gothic"/>
               </a:rPr>
-              <a:t>まず「未着手の97%に売る」がいかに難しいかを直視する</a:t>
+              <a:t>左は社内限りの原点。お客様（BtoB）には下の「言い方」に翻訳して話す</a:t>
+            </a:r>
+          </a:p>
+        </p:txBody>
+      </p:sp>
+      <p:sp>
+        <p:nvSpPr>
+          <p:cNvPr id="5" name="Rectangle 4"/>
+          <p:cNvSpPr/>
+          <p:nvPr/>
+        </p:nvSpPr>
+        <p:spPr>
+          <a:xfrm>
+            <a:off x="548640" y="1417320"/>
+            <a:ext cx="5394960" cy="2286000"/>
+          </a:xfrm>
+          <a:prstGeom prst="rect">
+            <a:avLst/>
+          </a:prstGeom>
+          <a:solidFill>
+            <a:srgbClr val="F2F5F8"/>
+          </a:solidFill>
+          <a:ln>
+            <a:noFill/>
+          </a:ln>
+          <a:effectLst/>
+        </p:spPr>
+        <p:style>
+          <a:lnRef idx="1">
+            <a:schemeClr val="accent1"/>
+          </a:lnRef>
+          <a:fillRef idx="3">
+            <a:schemeClr val="accent1"/>
+          </a:fillRef>
+          <a:effectRef idx="2">
+            <a:schemeClr val="accent1"/>
+          </a:effectRef>
+          <a:fontRef idx="minor">
+            <a:schemeClr val="lt1"/>
+          </a:fontRef>
+        </p:style>
+        <p:txBody>
+          <a:bodyPr rtlCol="0" anchor="ctr"/>
+          <a:lstStyle/>
+          <a:p>
+            <a:pPr algn="ctr"/>
+          </a:p>
+        </p:txBody>
+      </p:sp>
+      <p:sp>
+        <p:nvSpPr>
+          <p:cNvPr id="6" name="TextBox 5"/>
+          <p:cNvSpPr txBox="1"/>
+          <p:nvPr/>
+        </p:nvSpPr>
+        <p:spPr>
+          <a:xfrm>
+            <a:off x="777240" y="1536192"/>
+            <a:ext cx="4937760" cy="2103120"/>
+          </a:xfrm>
+          <a:prstGeom prst="rect">
+            <a:avLst/>
+          </a:prstGeom>
+          <a:noFill/>
+        </p:spPr>
+        <p:txBody>
+          <a:bodyPr wrap="square" anchor="t">
+            <a:spAutoFit/>
+          </a:bodyPr>
+          <a:lstStyle/>
+          <a:p>
+            <a:pPr algn="l"/>
+            <a:r>
+              <a:rPr sz="1200" b="1">
+                <a:solidFill>
+                  <a:srgbClr val="666666"/>
+                </a:solidFill>
+                <a:latin typeface="Yu Gothic"/>
+              </a:rPr>
+              <a:t>原点（社内限り・社長の言葉）</a:t>
+            </a:r>
+          </a:p>
+          <a:p>
+            <a:pPr algn="l"/>
+            <a:r>
+              <a:rPr sz="1200" b="0">
+                <a:solidFill>
+                  <a:srgbClr val="222222"/>
+                </a:solidFill>
+                <a:latin typeface="Yu Gothic"/>
+              </a:rPr>
+              <a:t>27年、下請けの空室工事。評価されることはなかった。それをサウナが初めて変えた——</a:t>
+            </a:r>
+          </a:p>
+          <a:p>
+            <a:pPr algn="l"/>
+            <a:r>
+              <a:rPr sz="1250" b="1">
+                <a:solidFill>
+                  <a:srgbClr val="1F3A5F"/>
+                </a:solidFill>
+                <a:latin typeface="Yu Gothic"/>
+              </a:rPr>
+              <a:t>「クレーム対象でしかなかった客が、満面の笑顔で会社の受付にいる。この異常事態がサウナの力」</a:t>
+            </a:r>
+          </a:p>
+          <a:p>
+            <a:pPr algn="l"/>
+            <a:r>
+              <a:rPr sz="1250" b="1">
+                <a:solidFill>
+                  <a:srgbClr val="2E7D32"/>
+                </a:solidFill>
+                <a:latin typeface="Yu Gothic"/>
+              </a:rPr>
+              <a:t>この事業は、その笑顔を他の会社にも届ける仕事。</a:t>
+            </a:r>
+          </a:p>
+        </p:txBody>
+      </p:sp>
+      <p:sp>
+        <p:nvSpPr>
+          <p:cNvPr id="7" name="Rectangle 6"/>
+          <p:cNvSpPr/>
+          <p:nvPr/>
+        </p:nvSpPr>
+        <p:spPr>
+          <a:xfrm>
+            <a:off x="6217920" y="1417320"/>
+            <a:ext cx="5394960" cy="2286000"/>
+          </a:xfrm>
+          <a:prstGeom prst="rect">
+            <a:avLst/>
+          </a:prstGeom>
+          <a:solidFill>
+            <a:srgbClr val="E8F0E9"/>
+          </a:solidFill>
+          <a:ln>
+            <a:noFill/>
+          </a:ln>
+          <a:effectLst/>
+        </p:spPr>
+        <p:style>
+          <a:lnRef idx="1">
+            <a:schemeClr val="accent1"/>
+          </a:lnRef>
+          <a:fillRef idx="3">
+            <a:schemeClr val="accent1"/>
+          </a:fillRef>
+          <a:effectRef idx="2">
+            <a:schemeClr val="accent1"/>
+          </a:effectRef>
+          <a:fontRef idx="minor">
+            <a:schemeClr val="lt1"/>
+          </a:fontRef>
+        </p:style>
+        <p:txBody>
+          <a:bodyPr rtlCol="0" anchor="ctr"/>
+          <a:lstStyle/>
+          <a:p>
+            <a:pPr algn="ctr"/>
+          </a:p>
+        </p:txBody>
+      </p:sp>
+      <p:sp>
+        <p:nvSpPr>
+          <p:cNvPr id="8" name="TextBox 7"/>
+          <p:cNvSpPr txBox="1"/>
+          <p:nvPr/>
+        </p:nvSpPr>
+        <p:spPr>
+          <a:xfrm>
+            <a:off x="6446520" y="1536192"/>
+            <a:ext cx="4937760" cy="2103120"/>
+          </a:xfrm>
+          <a:prstGeom prst="rect">
+            <a:avLst/>
+          </a:prstGeom>
+          <a:noFill/>
+        </p:spPr>
+        <p:txBody>
+          <a:bodyPr wrap="square" anchor="t">
+            <a:spAutoFit/>
+          </a:bodyPr>
+          <a:lstStyle/>
+          <a:p>
+            <a:pPr algn="l"/>
+            <a:r>
+              <a:rPr sz="1200" b="1">
+                <a:solidFill>
+                  <a:srgbClr val="666666"/>
+                </a:solidFill>
+                <a:latin typeface="Yu Gothic"/>
+              </a:rPr>
+              <a:t>理念（パーパス案B）＝存在理由</a:t>
+            </a:r>
+          </a:p>
+          <a:p>
+            <a:pPr algn="l"/>
+            <a:r>
+              <a:rPr sz="1450" b="1">
+                <a:solidFill>
+                  <a:srgbClr val="1F3A5F"/>
+                </a:solidFill>
+                <a:latin typeface="Yu Gothic"/>
+              </a:rPr>
+              <a:t>「住まいから、もう2歩3歩踏み込んで、暮らしと健康と、人生の幸福度を底上げする。」</a:t>
+            </a:r>
+          </a:p>
+          <a:p>
+            <a:pPr algn="l"/>
+            <a:r>
+              <a:rPr sz="1200" b="1">
+                <a:solidFill>
+                  <a:srgbClr val="222222"/>
+                </a:solidFill>
+                <a:latin typeface="Yu Gothic"/>
+              </a:rPr>
+              <a:t>ウェルネス事業部は、この理念の実行部隊第1号。多角化ではなく、理念の実装。</a:t>
             </a:r>
           </a:p>
         </p:txBody>
       </p:sp>
       <p:graphicFrame>
         <p:nvGraphicFramePr>
-          <p:cNvPr id="5" name="Table 4"/>
+          <p:cNvPr id="9" name="Table 8"/>
           <p:cNvGraphicFramePr>
             <a:graphicFrameLocks noGrp="1"/>
           </p:cNvGraphicFramePr>
           <p:nvPr/>
         </p:nvGraphicFramePr>
         <p:xfrm>
-          <a:off x="548640" y="1417320"/>
-          <a:ext cx="11064240" cy="3017520"/>
+          <a:off x="548640" y="3886200"/>
+          <a:ext cx="11064239" cy="2377440"/>
         </p:xfrm>
         <a:graphic>
           <a:graphicData uri="http://schemas.openxmlformats.org/drawingml/2006/table">
@@ -7346,10 +8033,10 @@
                 <a:tableStyleId>{5C22544A-7EE6-4342-B048-85BDC9FD1C3A}</a:tableStyleId>
               </a:tblPr>
               <a:tblGrid>
-                <a:gridCol w="5120640"/>
-                <a:gridCol w="5943600"/>
+                <a:gridCol w="4206239"/>
+                <a:gridCol w="6858000"/>
               </a:tblGrid>
-              <a:tr h="603504">
+              <a:tr h="475488">
                 <a:tc>
                   <a:txBody>
                     <a:bodyPr wrap="square"/>
@@ -7362,7 +8049,7 @@
                           </a:solidFill>
                           <a:latin typeface="Yu Gothic"/>
                         </a:rPr>
-                        <a:t>未着手層（宮城 約10万事業所）の現実</a:t>
+                        <a:t>社内の言葉（そのまま外では言わない）</a:t>
                       </a:r>
                     </a:p>
                   </a:txBody>
@@ -7384,7 +8071,7 @@
                           </a:solidFill>
                           <a:latin typeface="Yu Gothic"/>
                         </a:rPr>
-                        <a:t>データ・根拠</a:t>
+                        <a:t>お客様向けの言い方（BtoB）</a:t>
                       </a:r>
                     </a:p>
                   </a:txBody>
@@ -7395,20 +8082,20 @@
                   </a:tcPr>
                 </a:tc>
               </a:tr>
-              <a:tr h="603504">
-                <a:tc>
-                  <a:txBody>
-                    <a:bodyPr wrap="square"/>
-                    <a:lstStyle/>
-                    <a:p>
-                      <a:r>
-                        <a:rPr sz="1150" b="0">
-                          <a:solidFill>
-                            <a:srgbClr val="222222"/>
-                          </a:solidFill>
-                          <a:latin typeface="Yu Gothic"/>
-                        </a:rPr>
-                        <a:t>「健康経営」という言葉がそもそも通じない</a:t>
+              <a:tr h="475488">
+                <a:tc>
+                  <a:txBody>
+                    <a:bodyPr wrap="square"/>
+                    <a:lstStyle/>
+                    <a:p>
+                      <a:r>
+                        <a:rPr sz="950" b="0">
+                          <a:solidFill>
+                            <a:srgbClr val="222222"/>
+                          </a:solidFill>
+                          <a:latin typeface="Yu Gothic"/>
+                        </a:rPr>
+                        <a:t>「クレーム対象でしかなかった客が、満面の笑顔で受付にいる」</a:t>
                       </a:r>
                     </a:p>
                   </a:txBody>
@@ -7424,13 +8111,13 @@
                     <a:lstStyle/>
                     <a:p>
                       <a:r>
-                        <a:rPr sz="1150" b="0">
-                          <a:solidFill>
-                            <a:srgbClr val="222222"/>
-                          </a:solidFill>
-                          <a:latin typeface="Yu Gothic"/>
-                        </a:rPr>
-                        <a:t>浸透率0.65%。100社に営業して99社はゼロから説明が必要</a:t>
+                        <a:rPr sz="950" b="0">
+                          <a:solidFill>
+                            <a:srgbClr val="222222"/>
+                          </a:solidFill>
+                          <a:latin typeface="Yu Gothic"/>
+                        </a:rPr>
+                        <a:t>「27年磨いてきた施工の品質が、サウナで初めて“お客様の笑顔”として直接返ってきました。次は御社の社員さんの番です」</a:t>
                       </a:r>
                     </a:p>
                   </a:txBody>
@@ -7441,20 +8128,20 @@
                   </a:tcPr>
                 </a:tc>
               </a:tr>
-              <a:tr h="603504">
-                <a:tc>
-                  <a:txBody>
-                    <a:bodyPr wrap="square"/>
-                    <a:lstStyle/>
-                    <a:p>
-                      <a:r>
-                        <a:rPr sz="1150" b="0">
-                          <a:solidFill>
-                            <a:srgbClr val="222222"/>
-                          </a:solidFill>
-                          <a:latin typeface="Yu Gothic"/>
-                        </a:rPr>
-                        <a:t>説明して興味を持たれても、無料の競合に流れる</a:t>
+              <a:tr h="475488">
+                <a:tc>
+                  <a:txBody>
+                    <a:bodyPr wrap="square"/>
+                    <a:lstStyle/>
+                    <a:p>
+                      <a:r>
+                        <a:rPr sz="950" b="0">
+                          <a:solidFill>
+                            <a:srgbClr val="222222"/>
+                          </a:solidFill>
+                          <a:latin typeface="Yu Gothic"/>
+                        </a:rPr>
+                        <a:t>「下請けは使い捨てのコマだった」</a:t>
                       </a:r>
                     </a:p>
                   </a:txBody>
@@ -7470,13 +8157,13 @@
                     <a:lstStyle/>
                     <a:p>
                       <a:r>
-                        <a:rPr sz="1150" b="0">
-                          <a:solidFill>
-                            <a:srgbClr val="222222"/>
-                          </a:solidFill>
-                          <a:latin typeface="Yu Gothic"/>
-                        </a:rPr>
-                        <a:t>保険会社が全国の商工会議所の99%と提携し、無料で健康経営支援を提供</a:t>
+                        <a:rPr sz="950" b="0">
+                          <a:solidFill>
+                            <a:srgbClr val="222222"/>
+                          </a:solidFill>
+                          <a:latin typeface="Yu Gothic"/>
+                        </a:rPr>
+                        <a:t>「下請け・協力会社の現場を27年やってきた会社です。現場で働く人の疲労と睡眠の現実を、実感として分かります」</a:t>
                       </a:r>
                     </a:p>
                   </a:txBody>
@@ -7487,20 +8174,20 @@
                   </a:tcPr>
                 </a:tc>
               </a:tr>
-              <a:tr h="603504">
-                <a:tc>
-                  <a:txBody>
-                    <a:bodyPr wrap="square"/>
-                    <a:lstStyle/>
-                    <a:p>
-                      <a:r>
-                        <a:rPr sz="1150" b="0">
-                          <a:solidFill>
-                            <a:srgbClr val="222222"/>
-                          </a:solidFill>
-                          <a:latin typeface="Yu Gothic"/>
-                        </a:rPr>
-                        <a:t>そもそも払う財布がない</a:t>
+              <a:tr h="475488">
+                <a:tc>
+                  <a:txBody>
+                    <a:bodyPr wrap="square"/>
+                    <a:lstStyle/>
+                    <a:p>
+                      <a:r>
+                        <a:rPr sz="950" b="0">
+                          <a:solidFill>
+                            <a:srgbClr val="222222"/>
+                          </a:solidFill>
+                          <a:latin typeface="Yu Gothic"/>
+                        </a:rPr>
+                        <a:t>「買いたたく人とは仕事しない」</a:t>
                       </a:r>
                     </a:p>
                   </a:txBody>
@@ -7516,13 +8203,13 @@
                     <a:lstStyle/>
                     <a:p>
                       <a:r>
-                        <a:rPr sz="1150" b="0">
-                          <a:solidFill>
-                            <a:srgbClr val="222222"/>
-                          </a:solidFill>
-                          <a:latin typeface="Yu Gothic"/>
-                        </a:rPr>
-                        <a:t>県内事業所の約76%は従業員9人以下。福利厚生の財布は月2万円前後</a:t>
+                        <a:rPr sz="950" b="0">
+                          <a:solidFill>
+                            <a:srgbClr val="222222"/>
+                          </a:solidFill>
+                          <a:latin typeface="Yu Gothic"/>
+                        </a:rPr>
+                        <a:t>「協力会社さんも含めて、関わる全員の健康を大事にする会社づくりを、一緒にやりませんか」</a:t>
                       </a:r>
                     </a:p>
                   </a:txBody>
@@ -7533,20 +8220,20 @@
                   </a:tcPr>
                 </a:tc>
               </a:tr>
-              <a:tr h="603504">
-                <a:tc>
-                  <a:txBody>
-                    <a:bodyPr wrap="square"/>
-                    <a:lstStyle/>
-                    <a:p>
-                      <a:r>
-                        <a:rPr sz="1150" b="0">
-                          <a:solidFill>
-                            <a:srgbClr val="222222"/>
-                          </a:solidFill>
-                          <a:latin typeface="Yu Gothic"/>
-                        </a:rPr>
-                        <a:t>意思決定に時間がかかる</a:t>
+              <a:tr h="475488">
+                <a:tc>
+                  <a:txBody>
+                    <a:bodyPr wrap="square"/>
+                    <a:lstStyle/>
+                    <a:p>
+                      <a:r>
+                        <a:rPr sz="950" b="0">
+                          <a:solidFill>
+                            <a:srgbClr val="222222"/>
+                          </a:solidFill>
+                          <a:latin typeface="Yu Gothic"/>
+                        </a:rPr>
+                        <a:t>「もう2歩、踏み込む」</a:t>
                       </a:r>
                     </a:p>
                   </a:txBody>
@@ -7562,13 +8249,13 @@
                     <a:lstStyle/>
                     <a:p>
                       <a:r>
-                        <a:rPr sz="1150" b="0">
-                          <a:solidFill>
-                            <a:srgbClr val="222222"/>
-                          </a:solidFill>
-                          <a:latin typeface="Yu Gothic"/>
-                        </a:rPr>
-                        <a:t>「健康にお金を使う」初めての決断＝商談が長く、成約率が読めない</a:t>
+                        <a:rPr sz="950" b="0">
+                          <a:solidFill>
+                            <a:srgbClr val="222222"/>
+                          </a:solidFill>
+                          <a:latin typeface="Yu Gothic"/>
+                        </a:rPr>
+                        <a:t>「認定の書類で終わらせず、社員さんの体感と数字が変わるところまで伴走します」（これはそのまま使える）</a:t>
                       </a:r>
                     </a:p>
                   </a:txBody>
@@ -7585,14 +8272,14 @@
       </p:graphicFrame>
       <p:sp>
         <p:nvSpPr>
-          <p:cNvPr id="6" name="TextBox 5"/>
+          <p:cNvPr id="10" name="TextBox 9"/>
           <p:cNvSpPr txBox="1"/>
           <p:nvPr/>
         </p:nvSpPr>
         <p:spPr>
           <a:xfrm>
-            <a:off x="548640" y="4480560"/>
-            <a:ext cx="11064240" cy="1463040"/>
+            <a:off x="548640" y="6355080"/>
+            <a:ext cx="11064240" cy="457200"/>
           </a:xfrm>
           <a:prstGeom prst="rect">
             <a:avLst/>
@@ -7607,25 +8294,13 @@
           <a:p>
             <a:pPr algn="l"/>
             <a:r>
-              <a:rPr sz="1600" b="1">
-                <a:solidFill>
-                  <a:srgbClr val="C62828"/>
-                </a:solidFill>
-                <a:latin typeface="Yu Gothic"/>
-              </a:rPr>
-              <a:t>未着手層への営業は：説明コスト大 × 無料競合 × 財布なし × 決断が重い、の四重苦。</a:t>
-            </a:r>
-          </a:p>
-          <a:p>
-            <a:pPr algn="l"/>
-            <a:r>
-              <a:rPr sz="1400" b="0">
-                <a:solidFill>
-                  <a:srgbClr val="222222"/>
-                </a:solidFill>
-                <a:latin typeface="Yu Gothic"/>
-              </a:rPr>
-              <a:t>ここを主戦場にすると1名体制では体力が尽きる。入口（社長の睡眠測定など）だけに絞る。</a:t>
+              <a:rPr sz="1100" b="1">
+                <a:solidFill>
+                  <a:srgbClr val="1F3A5F"/>
+                </a:solidFill>
+                <a:latin typeface="Yu Gothic"/>
+              </a:rPr>
+              <a:t>バリューの実装：正直に（後金なし・保険を売らない）／対等に（協力会社の健康まで）／もう2歩（実感まで踏み込む）</a:t>
             </a:r>
           </a:p>
         </p:txBody>
@@ -7731,6 +8406,450 @@
                 </a:solidFill>
                 <a:latin typeface="Yu Gothic"/>
               </a:rPr>
+              <a:t>なぜ認定済み企業を狙うのか ①</a:t>
+            </a:r>
+          </a:p>
+        </p:txBody>
+      </p:sp>
+      <p:sp>
+        <p:nvSpPr>
+          <p:cNvPr id="4" name="TextBox 3"/>
+          <p:cNvSpPr txBox="1"/>
+          <p:nvPr/>
+        </p:nvSpPr>
+        <p:spPr>
+          <a:xfrm>
+            <a:off x="502920" y="896112"/>
+            <a:ext cx="11247120" cy="365760"/>
+          </a:xfrm>
+          <a:prstGeom prst="rect">
+            <a:avLst/>
+          </a:prstGeom>
+          <a:noFill/>
+        </p:spPr>
+        <p:txBody>
+          <a:bodyPr wrap="square" anchor="t">
+            <a:spAutoFit/>
+          </a:bodyPr>
+          <a:lstStyle/>
+          <a:p>
+            <a:pPr algn="l"/>
+            <a:r>
+              <a:rPr sz="1200" b="0">
+                <a:solidFill>
+                  <a:srgbClr val="666666"/>
+                </a:solidFill>
+                <a:latin typeface="Yu Gothic"/>
+              </a:rPr>
+              <a:t>まず「未着手の97%に売る」がいかに難しいかを直視する</a:t>
+            </a:r>
+          </a:p>
+        </p:txBody>
+      </p:sp>
+      <p:graphicFrame>
+        <p:nvGraphicFramePr>
+          <p:cNvPr id="5" name="Table 4"/>
+          <p:cNvGraphicFramePr>
+            <a:graphicFrameLocks noGrp="1"/>
+          </p:cNvGraphicFramePr>
+          <p:nvPr/>
+        </p:nvGraphicFramePr>
+        <p:xfrm>
+          <a:off x="548640" y="1417320"/>
+          <a:ext cx="11064240" cy="3017520"/>
+        </p:xfrm>
+        <a:graphic>
+          <a:graphicData uri="http://schemas.openxmlformats.org/drawingml/2006/table">
+            <a:tbl>
+              <a:tblPr firstRow="1" bandRow="1">
+                <a:tableStyleId>{5C22544A-7EE6-4342-B048-85BDC9FD1C3A}</a:tableStyleId>
+              </a:tblPr>
+              <a:tblGrid>
+                <a:gridCol w="5120640"/>
+                <a:gridCol w="5943600"/>
+              </a:tblGrid>
+              <a:tr h="603504">
+                <a:tc>
+                  <a:txBody>
+                    <a:bodyPr wrap="square"/>
+                    <a:lstStyle/>
+                    <a:p>
+                      <a:r>
+                        <a:rPr sz="1100" b="1">
+                          <a:solidFill>
+                            <a:srgbClr val="FFFFFF"/>
+                          </a:solidFill>
+                          <a:latin typeface="Yu Gothic"/>
+                        </a:rPr>
+                        <a:t>未着手層（宮城 約10万事業所）の現実</a:t>
+                      </a:r>
+                    </a:p>
+                  </a:txBody>
+                  <a:tcPr marL="54864" marR="54864" marT="18288" marB="18288">
+                    <a:solidFill>
+                      <a:srgbClr val="1F3A5F"/>
+                    </a:solidFill>
+                  </a:tcPr>
+                </a:tc>
+                <a:tc>
+                  <a:txBody>
+                    <a:bodyPr wrap="square"/>
+                    <a:lstStyle/>
+                    <a:p>
+                      <a:r>
+                        <a:rPr sz="1100" b="1">
+                          <a:solidFill>
+                            <a:srgbClr val="FFFFFF"/>
+                          </a:solidFill>
+                          <a:latin typeface="Yu Gothic"/>
+                        </a:rPr>
+                        <a:t>データ・根拠</a:t>
+                      </a:r>
+                    </a:p>
+                  </a:txBody>
+                  <a:tcPr marL="54864" marR="54864" marT="18288" marB="18288">
+                    <a:solidFill>
+                      <a:srgbClr val="1F3A5F"/>
+                    </a:solidFill>
+                  </a:tcPr>
+                </a:tc>
+              </a:tr>
+              <a:tr h="603504">
+                <a:tc>
+                  <a:txBody>
+                    <a:bodyPr wrap="square"/>
+                    <a:lstStyle/>
+                    <a:p>
+                      <a:r>
+                        <a:rPr sz="1150" b="0">
+                          <a:solidFill>
+                            <a:srgbClr val="222222"/>
+                          </a:solidFill>
+                          <a:latin typeface="Yu Gothic"/>
+                        </a:rPr>
+                        <a:t>「健康経営」という言葉がそもそも通じない</a:t>
+                      </a:r>
+                    </a:p>
+                  </a:txBody>
+                  <a:tcPr marL="54864" marR="54864" marT="18288" marB="18288">
+                    <a:solidFill>
+                      <a:srgbClr val="FFFFFF"/>
+                    </a:solidFill>
+                  </a:tcPr>
+                </a:tc>
+                <a:tc>
+                  <a:txBody>
+                    <a:bodyPr wrap="square"/>
+                    <a:lstStyle/>
+                    <a:p>
+                      <a:r>
+                        <a:rPr sz="1150" b="0">
+                          <a:solidFill>
+                            <a:srgbClr val="222222"/>
+                          </a:solidFill>
+                          <a:latin typeface="Yu Gothic"/>
+                        </a:rPr>
+                        <a:t>浸透率0.65%。100社に営業して99社はゼロから説明が必要</a:t>
+                      </a:r>
+                    </a:p>
+                  </a:txBody>
+                  <a:tcPr marL="54864" marR="54864" marT="18288" marB="18288">
+                    <a:solidFill>
+                      <a:srgbClr val="FFFFFF"/>
+                    </a:solidFill>
+                  </a:tcPr>
+                </a:tc>
+              </a:tr>
+              <a:tr h="603504">
+                <a:tc>
+                  <a:txBody>
+                    <a:bodyPr wrap="square"/>
+                    <a:lstStyle/>
+                    <a:p>
+                      <a:r>
+                        <a:rPr sz="1150" b="0">
+                          <a:solidFill>
+                            <a:srgbClr val="222222"/>
+                          </a:solidFill>
+                          <a:latin typeface="Yu Gothic"/>
+                        </a:rPr>
+                        <a:t>説明して興味を持たれても、無料の競合に流れる</a:t>
+                      </a:r>
+                    </a:p>
+                  </a:txBody>
+                  <a:tcPr marL="54864" marR="54864" marT="18288" marB="18288">
+                    <a:solidFill>
+                      <a:srgbClr val="F2F5F8"/>
+                    </a:solidFill>
+                  </a:tcPr>
+                </a:tc>
+                <a:tc>
+                  <a:txBody>
+                    <a:bodyPr wrap="square"/>
+                    <a:lstStyle/>
+                    <a:p>
+                      <a:r>
+                        <a:rPr sz="1150" b="0">
+                          <a:solidFill>
+                            <a:srgbClr val="222222"/>
+                          </a:solidFill>
+                          <a:latin typeface="Yu Gothic"/>
+                        </a:rPr>
+                        <a:t>保険会社が全国の商工会議所の99%と提携し、無料で健康経営支援を提供</a:t>
+                      </a:r>
+                    </a:p>
+                  </a:txBody>
+                  <a:tcPr marL="54864" marR="54864" marT="18288" marB="18288">
+                    <a:solidFill>
+                      <a:srgbClr val="F2F5F8"/>
+                    </a:solidFill>
+                  </a:tcPr>
+                </a:tc>
+              </a:tr>
+              <a:tr h="603504">
+                <a:tc>
+                  <a:txBody>
+                    <a:bodyPr wrap="square"/>
+                    <a:lstStyle/>
+                    <a:p>
+                      <a:r>
+                        <a:rPr sz="1150" b="0">
+                          <a:solidFill>
+                            <a:srgbClr val="222222"/>
+                          </a:solidFill>
+                          <a:latin typeface="Yu Gothic"/>
+                        </a:rPr>
+                        <a:t>そもそも払う財布がない</a:t>
+                      </a:r>
+                    </a:p>
+                  </a:txBody>
+                  <a:tcPr marL="54864" marR="54864" marT="18288" marB="18288">
+                    <a:solidFill>
+                      <a:srgbClr val="FFFFFF"/>
+                    </a:solidFill>
+                  </a:tcPr>
+                </a:tc>
+                <a:tc>
+                  <a:txBody>
+                    <a:bodyPr wrap="square"/>
+                    <a:lstStyle/>
+                    <a:p>
+                      <a:r>
+                        <a:rPr sz="1150" b="0">
+                          <a:solidFill>
+                            <a:srgbClr val="222222"/>
+                          </a:solidFill>
+                          <a:latin typeface="Yu Gothic"/>
+                        </a:rPr>
+                        <a:t>県内事業所の約76%は従業員9人以下。福利厚生の財布は月2万円前後</a:t>
+                      </a:r>
+                    </a:p>
+                  </a:txBody>
+                  <a:tcPr marL="54864" marR="54864" marT="18288" marB="18288">
+                    <a:solidFill>
+                      <a:srgbClr val="FFFFFF"/>
+                    </a:solidFill>
+                  </a:tcPr>
+                </a:tc>
+              </a:tr>
+              <a:tr h="603504">
+                <a:tc>
+                  <a:txBody>
+                    <a:bodyPr wrap="square"/>
+                    <a:lstStyle/>
+                    <a:p>
+                      <a:r>
+                        <a:rPr sz="1150" b="0">
+                          <a:solidFill>
+                            <a:srgbClr val="222222"/>
+                          </a:solidFill>
+                          <a:latin typeface="Yu Gothic"/>
+                        </a:rPr>
+                        <a:t>意思決定に時間がかかる</a:t>
+                      </a:r>
+                    </a:p>
+                  </a:txBody>
+                  <a:tcPr marL="54864" marR="54864" marT="18288" marB="18288">
+                    <a:solidFill>
+                      <a:srgbClr val="F2F5F8"/>
+                    </a:solidFill>
+                  </a:tcPr>
+                </a:tc>
+                <a:tc>
+                  <a:txBody>
+                    <a:bodyPr wrap="square"/>
+                    <a:lstStyle/>
+                    <a:p>
+                      <a:r>
+                        <a:rPr sz="1150" b="0">
+                          <a:solidFill>
+                            <a:srgbClr val="222222"/>
+                          </a:solidFill>
+                          <a:latin typeface="Yu Gothic"/>
+                        </a:rPr>
+                        <a:t>「健康にお金を使う」初めての決断＝商談が長く、成約率が読めない</a:t>
+                      </a:r>
+                    </a:p>
+                  </a:txBody>
+                  <a:tcPr marL="54864" marR="54864" marT="18288" marB="18288">
+                    <a:solidFill>
+                      <a:srgbClr val="F2F5F8"/>
+                    </a:solidFill>
+                  </a:tcPr>
+                </a:tc>
+              </a:tr>
+            </a:tbl>
+          </a:graphicData>
+        </a:graphic>
+      </p:graphicFrame>
+      <p:sp>
+        <p:nvSpPr>
+          <p:cNvPr id="6" name="TextBox 5"/>
+          <p:cNvSpPr txBox="1"/>
+          <p:nvPr/>
+        </p:nvSpPr>
+        <p:spPr>
+          <a:xfrm>
+            <a:off x="548640" y="4480560"/>
+            <a:ext cx="11064240" cy="1463040"/>
+          </a:xfrm>
+          <a:prstGeom prst="rect">
+            <a:avLst/>
+          </a:prstGeom>
+          <a:noFill/>
+        </p:spPr>
+        <p:txBody>
+          <a:bodyPr wrap="square" anchor="t">
+            <a:spAutoFit/>
+          </a:bodyPr>
+          <a:lstStyle/>
+          <a:p>
+            <a:pPr algn="l"/>
+            <a:r>
+              <a:rPr sz="1600" b="1">
+                <a:solidFill>
+                  <a:srgbClr val="C62828"/>
+                </a:solidFill>
+                <a:latin typeface="Yu Gothic"/>
+              </a:rPr>
+              <a:t>未着手層への営業は：説明コスト大 × 無料競合 × 財布なし × 決断が重い、の四重苦。</a:t>
+            </a:r>
+          </a:p>
+          <a:p>
+            <a:pPr algn="l"/>
+            <a:r>
+              <a:rPr sz="1400" b="0">
+                <a:solidFill>
+                  <a:srgbClr val="222222"/>
+                </a:solidFill>
+                <a:latin typeface="Yu Gothic"/>
+              </a:rPr>
+              <a:t>ここを主戦場にすると1名体制では体力が尽きる。入口（社長の睡眠測定など）だけに絞る。</a:t>
+            </a:r>
+          </a:p>
+        </p:txBody>
+      </p:sp>
+    </p:spTree>
+  </p:cSld>
+  <p:clrMapOvr>
+    <a:masterClrMapping/>
+  </p:clrMapOvr>
+</p:sld>
+</file>
+
+<file path=ppt/slides/slide5.xml><?xml version="1.0" encoding="utf-8"?>
+<p:sld xmlns:a="http://schemas.openxmlformats.org/drawingml/2006/main" xmlns:p="http://schemas.openxmlformats.org/presentationml/2006/main" xmlns:r="http://schemas.openxmlformats.org/officeDocument/2006/relationships">
+  <p:cSld>
+    <p:spTree>
+      <p:nvGrpSpPr>
+        <p:cNvPr id="1" name=""/>
+        <p:cNvGrpSpPr/>
+        <p:nvPr/>
+      </p:nvGrpSpPr>
+      <p:grpSpPr/>
+      <p:sp>
+        <p:nvSpPr>
+          <p:cNvPr id="2" name="Rectangle 1"/>
+          <p:cNvSpPr/>
+          <p:nvPr/>
+        </p:nvSpPr>
+        <p:spPr>
+          <a:xfrm>
+            <a:off x="0" y="0"/>
+            <a:ext cx="12191695" cy="868680"/>
+          </a:xfrm>
+          <a:prstGeom prst="rect">
+            <a:avLst/>
+          </a:prstGeom>
+          <a:solidFill>
+            <a:srgbClr val="1F3A5F"/>
+          </a:solidFill>
+          <a:ln>
+            <a:noFill/>
+          </a:ln>
+          <a:effectLst/>
+        </p:spPr>
+        <p:style>
+          <a:lnRef idx="1">
+            <a:schemeClr val="accent1"/>
+          </a:lnRef>
+          <a:fillRef idx="3">
+            <a:schemeClr val="accent1"/>
+          </a:fillRef>
+          <a:effectRef idx="2">
+            <a:schemeClr val="accent1"/>
+          </a:effectRef>
+          <a:fontRef idx="minor">
+            <a:schemeClr val="lt1"/>
+          </a:fontRef>
+        </p:style>
+        <p:txBody>
+          <a:bodyPr rtlCol="0" anchor="ctr"/>
+          <a:lstStyle/>
+          <a:p>
+            <a:pPr algn="ctr"/>
+          </a:p>
+        </p:txBody>
+      </p:sp>
+      <p:sp>
+        <p:nvSpPr>
+          <p:cNvPr id="3" name="TextBox 2"/>
+          <p:cNvSpPr txBox="1"/>
+          <p:nvPr/>
+        </p:nvSpPr>
+        <p:spPr>
+          <a:xfrm>
+            <a:off x="457200" y="109728"/>
+            <a:ext cx="11247120" cy="640080"/>
+          </a:xfrm>
+          <a:prstGeom prst="rect">
+            <a:avLst/>
+          </a:prstGeom>
+          <a:noFill/>
+        </p:spPr>
+        <p:txBody>
+          <a:bodyPr wrap="square" anchor="ctr">
+            <a:spAutoFit/>
+          </a:bodyPr>
+          <a:lstStyle/>
+          <a:p>
+            <a:pPr algn="l"/>
+            <a:r>
+              <a:rPr sz="2200" b="1">
+                <a:solidFill>
+                  <a:srgbClr val="9FC5A0"/>
+                </a:solidFill>
+                <a:latin typeface="Yu Gothic"/>
+              </a:rPr>
+              <a:t>04  </a:t>
+            </a:r>
+            <a:r>
+              <a:rPr sz="2200" b="1">
+                <a:solidFill>
+                  <a:srgbClr val="FFFFFF"/>
+                </a:solidFill>
+                <a:latin typeface="Yu Gothic"/>
+              </a:rPr>
               <a:t>なぜ認定済み企業を狙うのか ②</a:t>
             </a:r>
           </a:p>
@@ -8095,7 +9214,7 @@
 </p:sld>
 </file>
 
-<file path=ppt/slides/slide5.xml><?xml version="1.0" encoding="utf-8"?>
+<file path=ppt/slides/slide6.xml><?xml version="1.0" encoding="utf-8"?>
 <p:sld xmlns:a="http://schemas.openxmlformats.org/drawingml/2006/main" xmlns:p="http://schemas.openxmlformats.org/presentationml/2006/main" xmlns:r="http://schemas.openxmlformats.org/officeDocument/2006/relationships">
   <p:cSld>
     <p:spTree>
@@ -8179,7 +9298,7 @@
                 </a:solidFill>
                 <a:latin typeface="Yu Gothic"/>
               </a:rPr>
-              <a:t>04  </a:t>
+              <a:t>05  </a:t>
             </a:r>
             <a:r>
               <a:rPr sz="2200" b="1">
@@ -8794,7 +9913,7 @@
 </p:sld>
 </file>
 
-<file path=ppt/slides/slide6.xml><?xml version="1.0" encoding="utf-8"?>
+<file path=ppt/slides/slide7.xml><?xml version="1.0" encoding="utf-8"?>
 <p:sld xmlns:a="http://schemas.openxmlformats.org/drawingml/2006/main" xmlns:p="http://schemas.openxmlformats.org/presentationml/2006/main" xmlns:r="http://schemas.openxmlformats.org/officeDocument/2006/relationships">
   <p:cSld>
     <p:spTree>
@@ -8878,7 +9997,7 @@
                 </a:solidFill>
                 <a:latin typeface="Yu Gothic"/>
               </a:rPr>
-              <a:t>05  </a:t>
+              <a:t>06  </a:t>
             </a:r>
             <a:r>
               <a:rPr sz="2200" b="1">
@@ -9743,7 +10862,7 @@
 </p:sld>
 </file>
 
-<file path=ppt/slides/slide7.xml><?xml version="1.0" encoding="utf-8"?>
+<file path=ppt/slides/slide8.xml><?xml version="1.0" encoding="utf-8"?>
 <p:sld xmlns:a="http://schemas.openxmlformats.org/drawingml/2006/main" xmlns:p="http://schemas.openxmlformats.org/presentationml/2006/main" xmlns:r="http://schemas.openxmlformats.org/officeDocument/2006/relationships">
   <p:cSld>
     <p:spTree>
@@ -9827,7 +10946,7 @@
                 </a:solidFill>
                 <a:latin typeface="Yu Gothic"/>
               </a:rPr>
-              <a:t>06  </a:t>
+              <a:t>07  </a:t>
             </a:r>
             <a:r>
               <a:rPr sz="2200" b="1">
@@ -10722,7 +11841,7 @@
 </p:sld>
 </file>
 
-<file path=ppt/slides/slide8.xml><?xml version="1.0" encoding="utf-8"?>
+<file path=ppt/slides/slide9.xml><?xml version="1.0" encoding="utf-8"?>
 <p:sld xmlns:a="http://schemas.openxmlformats.org/drawingml/2006/main" xmlns:p="http://schemas.openxmlformats.org/presentationml/2006/main" xmlns:r="http://schemas.openxmlformats.org/officeDocument/2006/relationships">
   <p:cSld>
     <p:spTree>
@@ -10806,7 +11925,7 @@
                 </a:solidFill>
                 <a:latin typeface="Yu Gothic"/>
               </a:rPr>
-              <a:t>07  </a:t>
+              <a:t>08  </a:t>
             </a:r>
             <a:r>
               <a:rPr sz="2200" b="1">
@@ -11313,474 +12432,6 @@
                 <a:latin typeface="Yu Gothic"/>
               </a:rPr>
               <a:t>営業のクロージングは「1年後、社長は何を自慢できているか」を見せること。</a:t>
-            </a:r>
-          </a:p>
-        </p:txBody>
-      </p:sp>
-    </p:spTree>
-  </p:cSld>
-  <p:clrMapOvr>
-    <a:masterClrMapping/>
-  </p:clrMapOvr>
-</p:sld>
-</file>
-
-<file path=ppt/slides/slide9.xml><?xml version="1.0" encoding="utf-8"?>
-<p:sld xmlns:a="http://schemas.openxmlformats.org/drawingml/2006/main" xmlns:p="http://schemas.openxmlformats.org/presentationml/2006/main" xmlns:r="http://schemas.openxmlformats.org/officeDocument/2006/relationships">
-  <p:cSld>
-    <p:spTree>
-      <p:nvGrpSpPr>
-        <p:cNvPr id="1" name=""/>
-        <p:cNvGrpSpPr/>
-        <p:nvPr/>
-      </p:nvGrpSpPr>
-      <p:grpSpPr/>
-      <p:sp>
-        <p:nvSpPr>
-          <p:cNvPr id="2" name="Rectangle 1"/>
-          <p:cNvSpPr/>
-          <p:nvPr/>
-        </p:nvSpPr>
-        <p:spPr>
-          <a:xfrm>
-            <a:off x="0" y="0"/>
-            <a:ext cx="12191695" cy="868680"/>
-          </a:xfrm>
-          <a:prstGeom prst="rect">
-            <a:avLst/>
-          </a:prstGeom>
-          <a:solidFill>
-            <a:srgbClr val="1F3A5F"/>
-          </a:solidFill>
-          <a:ln>
-            <a:noFill/>
-          </a:ln>
-          <a:effectLst/>
-        </p:spPr>
-        <p:style>
-          <a:lnRef idx="1">
-            <a:schemeClr val="accent1"/>
-          </a:lnRef>
-          <a:fillRef idx="3">
-            <a:schemeClr val="accent1"/>
-          </a:fillRef>
-          <a:effectRef idx="2">
-            <a:schemeClr val="accent1"/>
-          </a:effectRef>
-          <a:fontRef idx="minor">
-            <a:schemeClr val="lt1"/>
-          </a:fontRef>
-        </p:style>
-        <p:txBody>
-          <a:bodyPr rtlCol="0" anchor="ctr"/>
-          <a:lstStyle/>
-          <a:p>
-            <a:pPr algn="ctr"/>
-          </a:p>
-        </p:txBody>
-      </p:sp>
-      <p:sp>
-        <p:nvSpPr>
-          <p:cNvPr id="3" name="TextBox 2"/>
-          <p:cNvSpPr txBox="1"/>
-          <p:nvPr/>
-        </p:nvSpPr>
-        <p:spPr>
-          <a:xfrm>
-            <a:off x="457200" y="109728"/>
-            <a:ext cx="11247120" cy="640080"/>
-          </a:xfrm>
-          <a:prstGeom prst="rect">
-            <a:avLst/>
-          </a:prstGeom>
-          <a:noFill/>
-        </p:spPr>
-        <p:txBody>
-          <a:bodyPr wrap="square" anchor="ctr">
-            <a:spAutoFit/>
-          </a:bodyPr>
-          <a:lstStyle/>
-          <a:p>
-            <a:pPr algn="l"/>
-            <a:r>
-              <a:rPr sz="2200" b="1">
-                <a:solidFill>
-                  <a:srgbClr val="9FC5A0"/>
-                </a:solidFill>
-                <a:latin typeface="Yu Gothic"/>
-              </a:rPr>
-              <a:t>08  </a:t>
-            </a:r>
-            <a:r>
-              <a:rPr sz="2200" b="1">
-                <a:solidFill>
-                  <a:srgbClr val="FFFFFF"/>
-                </a:solidFill>
-                <a:latin typeface="Yu Gothic"/>
-              </a:rPr>
-              <a:t>売り方 ― 認定済みには「回収」、未着手には「健康経営と言わない」</a:t>
-            </a:r>
-          </a:p>
-        </p:txBody>
-      </p:sp>
-      <p:sp>
-        <p:nvSpPr>
-          <p:cNvPr id="4" name="Rectangle 3"/>
-          <p:cNvSpPr/>
-          <p:nvPr/>
-        </p:nvSpPr>
-        <p:spPr>
-          <a:xfrm>
-            <a:off x="548640" y="1280160"/>
-            <a:ext cx="5394960" cy="4572000"/>
-          </a:xfrm>
-          <a:prstGeom prst="rect">
-            <a:avLst/>
-          </a:prstGeom>
-          <a:solidFill>
-            <a:srgbClr val="E8F0E9"/>
-          </a:solidFill>
-          <a:ln>
-            <a:noFill/>
-          </a:ln>
-          <a:effectLst/>
-        </p:spPr>
-        <p:style>
-          <a:lnRef idx="1">
-            <a:schemeClr val="accent1"/>
-          </a:lnRef>
-          <a:fillRef idx="3">
-            <a:schemeClr val="accent1"/>
-          </a:fillRef>
-          <a:effectRef idx="2">
-            <a:schemeClr val="accent1"/>
-          </a:effectRef>
-          <a:fontRef idx="minor">
-            <a:schemeClr val="lt1"/>
-          </a:fontRef>
-        </p:style>
-        <p:txBody>
-          <a:bodyPr rtlCol="0" anchor="ctr"/>
-          <a:lstStyle/>
-          <a:p>
-            <a:pPr algn="ctr"/>
-          </a:p>
-        </p:txBody>
-      </p:sp>
-      <p:sp>
-        <p:nvSpPr>
-          <p:cNvPr id="5" name="TextBox 4"/>
-          <p:cNvSpPr txBox="1"/>
-          <p:nvPr/>
-        </p:nvSpPr>
-        <p:spPr>
-          <a:xfrm>
-            <a:off x="777240" y="1417320"/>
-            <a:ext cx="4937760" cy="4297680"/>
-          </a:xfrm>
-          <a:prstGeom prst="rect">
-            <a:avLst/>
-          </a:prstGeom>
-          <a:noFill/>
-        </p:spPr>
-        <p:txBody>
-          <a:bodyPr wrap="square" anchor="t">
-            <a:spAutoFit/>
-          </a:bodyPr>
-          <a:lstStyle/>
-          <a:p>
-            <a:pPr algn="l"/>
-            <a:r>
-              <a:rPr sz="1500" b="1">
-                <a:solidFill>
-                  <a:srgbClr val="2E7D32"/>
-                </a:solidFill>
-                <a:latin typeface="Yu Gothic"/>
-              </a:rPr>
-              <a:t>A：認定済み企業（679社）</a:t>
-            </a:r>
-          </a:p>
-          <a:p>
-            <a:pPr algn="l"/>
-            <a:r>
-              <a:rPr sz="1300" b="1">
-                <a:solidFill>
-                  <a:srgbClr val="1F3A5F"/>
-                </a:solidFill>
-                <a:latin typeface="Yu Gothic"/>
-              </a:rPr>
-              <a:t>「取った認定を回収しましょう」</a:t>
-            </a:r>
-          </a:p>
-          <a:p>
-            <a:pPr algn="l"/>
-            <a:r>
-              <a:rPr sz="500" b="0">
-                <a:solidFill>
-                  <a:srgbClr val="666666"/>
-                </a:solidFill>
-                <a:latin typeface="Yu Gothic"/>
-              </a:rPr>
-              <a:t/>
-            </a:r>
-          </a:p>
-          <a:p>
-            <a:pPr algn="l"/>
-            <a:r>
-              <a:rPr sz="1150" b="0">
-                <a:solidFill>
-                  <a:srgbClr val="222222"/>
-                </a:solidFill>
-                <a:latin typeface="Yu Gothic"/>
-              </a:rPr>
-              <a:t>痛み：認定は取ったが変わらない／毎年の申請が重い／施策の弾切れ／社員が乗ってこない</a:t>
-            </a:r>
-          </a:p>
-          <a:p>
-            <a:pPr algn="l"/>
-            <a:r>
-              <a:rPr sz="500" b="0">
-                <a:solidFill>
-                  <a:srgbClr val="666666"/>
-                </a:solidFill>
-                <a:latin typeface="Yu Gothic"/>
-              </a:rPr>
-              <a:t/>
-            </a:r>
-          </a:p>
-          <a:p>
-            <a:pPr algn="l"/>
-            <a:r>
-              <a:rPr sz="1150" b="1">
-                <a:solidFill>
-                  <a:srgbClr val="222222"/>
-                </a:solidFill>
-                <a:latin typeface="Yu Gothic"/>
-              </a:rPr>
-              <a:t>武器：認定調査票の項目×セミナー6本の対応表——「今年の申請書の実施実績、これで全部埋まります」</a:t>
-            </a:r>
-          </a:p>
-          <a:p>
-            <a:pPr algn="l"/>
-            <a:r>
-              <a:rPr sz="500" b="0">
-                <a:solidFill>
-                  <a:srgbClr val="666666"/>
-                </a:solidFill>
-                <a:latin typeface="Yu Gothic"/>
-              </a:rPr>
-              <a:t/>
-            </a:r>
-          </a:p>
-          <a:p>
-            <a:pPr algn="l"/>
-            <a:r>
-              <a:rPr sz="1150" b="0">
-                <a:solidFill>
-                  <a:srgbClr val="222222"/>
-                </a:solidFill>
-                <a:latin typeface="Yu Gothic"/>
-              </a:rPr>
-              <a:t>順番：社員割引カード→サウナデー→年間パック→施工</a:t>
-            </a:r>
-          </a:p>
-          <a:p>
-            <a:pPr algn="l"/>
-            <a:r>
-              <a:rPr sz="1100" b="0">
-                <a:solidFill>
-                  <a:srgbClr val="666666"/>
-                </a:solidFill>
-                <a:latin typeface="Yu Gothic"/>
-              </a:rPr>
-              <a:t>30秒トーク：「認定企業さんを回っていると皆さんおっしゃるんです——取ったはいいけど何も変わらないと。実はうちも同じでした」</a:t>
-            </a:r>
-          </a:p>
-        </p:txBody>
-      </p:sp>
-      <p:sp>
-        <p:nvSpPr>
-          <p:cNvPr id="6" name="Rectangle 5"/>
-          <p:cNvSpPr/>
-          <p:nvPr/>
-        </p:nvSpPr>
-        <p:spPr>
-          <a:xfrm>
-            <a:off x="6217920" y="1280160"/>
-            <a:ext cx="5394960" cy="4572000"/>
-          </a:xfrm>
-          <a:prstGeom prst="rect">
-            <a:avLst/>
-          </a:prstGeom>
-          <a:solidFill>
-            <a:srgbClr val="F2F5F8"/>
-          </a:solidFill>
-          <a:ln>
-            <a:noFill/>
-          </a:ln>
-          <a:effectLst/>
-        </p:spPr>
-        <p:style>
-          <a:lnRef idx="1">
-            <a:schemeClr val="accent1"/>
-          </a:lnRef>
-          <a:fillRef idx="3">
-            <a:schemeClr val="accent1"/>
-          </a:fillRef>
-          <a:effectRef idx="2">
-            <a:schemeClr val="accent1"/>
-          </a:effectRef>
-          <a:fontRef idx="minor">
-            <a:schemeClr val="lt1"/>
-          </a:fontRef>
-        </p:style>
-        <p:txBody>
-          <a:bodyPr rtlCol="0" anchor="ctr"/>
-          <a:lstStyle/>
-          <a:p>
-            <a:pPr algn="ctr"/>
-          </a:p>
-        </p:txBody>
-      </p:sp>
-      <p:sp>
-        <p:nvSpPr>
-          <p:cNvPr id="7" name="TextBox 6"/>
-          <p:cNvSpPr txBox="1"/>
-          <p:nvPr/>
-        </p:nvSpPr>
-        <p:spPr>
-          <a:xfrm>
-            <a:off x="6446520" y="1417320"/>
-            <a:ext cx="4937760" cy="4297680"/>
-          </a:xfrm>
-          <a:prstGeom prst="rect">
-            <a:avLst/>
-          </a:prstGeom>
-          <a:noFill/>
-        </p:spPr>
-        <p:txBody>
-          <a:bodyPr wrap="square" anchor="t">
-            <a:spAutoFit/>
-          </a:bodyPr>
-          <a:lstStyle/>
-          <a:p>
-            <a:pPr algn="l"/>
-            <a:r>
-              <a:rPr sz="1500" b="1">
-                <a:solidFill>
-                  <a:srgbClr val="1F3A5F"/>
-                </a:solidFill>
-                <a:latin typeface="Yu Gothic"/>
-              </a:rPr>
-              <a:t>B：未着手層（97%）</a:t>
-            </a:r>
-          </a:p>
-          <a:p>
-            <a:pPr algn="l"/>
-            <a:r>
-              <a:rPr sz="1300" b="1">
-                <a:solidFill>
-                  <a:srgbClr val="C62828"/>
-                </a:solidFill>
-                <a:latin typeface="Yu Gothic"/>
-              </a:rPr>
-              <a:t>「健康経営」と言わずに売る</a:t>
-            </a:r>
-          </a:p>
-          <a:p>
-            <a:pPr algn="l"/>
-            <a:r>
-              <a:rPr sz="500" b="0">
-                <a:solidFill>
-                  <a:srgbClr val="666666"/>
-                </a:solidFill>
-                <a:latin typeface="Yu Gothic"/>
-              </a:rPr>
-              <a:t/>
-            </a:r>
-          </a:p>
-          <a:p>
-            <a:pPr algn="l"/>
-            <a:r>
-              <a:rPr sz="1150" b="0">
-                <a:solidFill>
-                  <a:srgbClr val="222222"/>
-                </a:solidFill>
-                <a:latin typeface="Yu Gothic"/>
-              </a:rPr>
-              <a:t>「求人出しても来ない」→ 求人票に書ける福利厚生パック</a:t>
-            </a:r>
-          </a:p>
-          <a:p>
-            <a:pPr algn="l"/>
-            <a:r>
-              <a:rPr sz="1150" b="0">
-                <a:solidFill>
-                  <a:srgbClr val="222222"/>
-                </a:solidFill>
-                <a:latin typeface="Yu Gothic"/>
-              </a:rPr>
-              <a:t>「若手が辞めた」→ 社員が辞めない会社づくりセミナー</a:t>
-            </a:r>
-          </a:p>
-          <a:p>
-            <a:pPr algn="l"/>
-            <a:r>
-              <a:rPr sz="1150" b="1">
-                <a:solidFill>
-                  <a:srgbClr val="222222"/>
-                </a:solidFill>
-                <a:latin typeface="Yu Gothic"/>
-              </a:rPr>
-              <a:t>「最近眠れなくて」→ 社長の睡眠測定（1〜3万）＝標準初回商品</a:t>
-            </a:r>
-          </a:p>
-          <a:p>
-            <a:pPr algn="l"/>
-            <a:r>
-              <a:rPr sz="1150" b="0">
-                <a:solidFill>
-                  <a:srgbClr val="222222"/>
-                </a:solidFill>
-                <a:latin typeface="Yu Gothic"/>
-              </a:rPr>
-              <a:t>「労災が怖い」→ 睡眠×安全衛生セミナー（安全大会の講師枠）</a:t>
-            </a:r>
-          </a:p>
-          <a:p>
-            <a:pPr algn="l"/>
-            <a:r>
-              <a:rPr sz="500" b="0">
-                <a:solidFill>
-                  <a:srgbClr val="666666"/>
-                </a:solidFill>
-                <a:latin typeface="Yu Gothic"/>
-              </a:rPr>
-              <a:t/>
-            </a:r>
-          </a:p>
-          <a:p>
-            <a:pPr algn="l"/>
-            <a:r>
-              <a:rPr sz="1150" b="1">
-                <a:solidFill>
-                  <a:srgbClr val="C62828"/>
-                </a:solidFill>
-                <a:latin typeface="Yu Gothic"/>
-              </a:rPr>
-              <a:t>使わない言葉：健康経営／ウェルネス／エンゲージメント</a:t>
-            </a:r>
-          </a:p>
-          <a:p>
-            <a:pPr algn="l"/>
-            <a:r>
-              <a:rPr sz="1150" b="0">
-                <a:solidFill>
-                  <a:srgbClr val="222222"/>
-                </a:solidFill>
-                <a:latin typeface="Yu Gothic"/>
-              </a:rPr>
-              <a:t>使う言葉：「求人票に書ける福利厚生」「社長の睡眠の通信簿」</a:t>
             </a:r>
           </a:p>
         </p:txBody>
